--- a/docs/präsentation/praesentation_gruppe4_teil1.pptx
+++ b/docs/präsentation/praesentation_gruppe4_teil1.pptx
@@ -7235,7 +7235,7 @@
         </p:nvSpPr>
         <p:spPr>
           <a:xfrm>
-            <a:off x="2697480" y="3154680"/>
+            <a:off x="1737360" y="3154680"/>
             <a:ext cx="2743200" cy="365760"/>
           </a:xfrm>
           <a:prstGeom prst="rect">
@@ -7261,7 +7261,7 @@
               </a:defRPr>
             </a:pPr>
             <a:r>
-              <a:t>bpuic</a:t>
+              <a:t>bpuic_haltestelle = bpuic</a:t>
             </a:r>
           </a:p>
         </p:txBody>
@@ -13342,7 +13342,7 @@
               </a:defRPr>
             </a:pPr>
             <a:r>
-              <a:t>Ankunft gemessen: Bahn 89,7 %, Bus 65,9 %, der Rest sind Prognosen oder Schätzungen. Der Status ist pro Zeit gespeichert, Paket C nimmt nur gemessene Werte.</a:t>
+              <a:t>Ankunft gemessen: Bahn 89,7 %, Bus 65,9 %. Der Rest sind Prognosen, Schätzungen oder Halte mit leerem oder unbekanntem Status (z. B. ohne Ankunft am Startort). Der Status ist pro Zeit gespeichert, Paket C nimmt nur gemessene Werte.</a:t>
             </a:r>
           </a:p>
         </p:txBody>
@@ -19289,7 +19289,7 @@
               </a:defRPr>
             </a:pPr>
             <a:r>
-              <a:t>• Status jeder Zeit (REAL, PROGNOSE, GESCHAETZT) wird mitgeführt</a:t>
+              <a:t>• Status jeder Zeit (REAL, PROGNOSE, GESCHAETZT, UNBEKANNT, leer) wird mitgeführt</a:t>
             </a:r>
           </a:p>
         </p:txBody>

--- a/docs/präsentation/praesentation_gruppe4_teil1.pptx
+++ b/docs/präsentation/praesentation_gruppe4_teil1.pptx
@@ -943,7 +943,7 @@
           <a:lstStyle/>
           <a:p>
             <a:r>
-              <a:t>Ca. 75 Sekunden. Stark bedeutet strikt mehr als 1,7 mm pro Stunde. Das ist das 90. Perzentil positiver Stationsstunden, vor dem Halt-Join berechnet. Vergleich stark gegen alle übrigen Halte: 1,613 statt 1,393 Minuten. Mann-Whitney-U prüft Verteilungsunterschiede; ergänzend Mittelwertdifferenz. Rang-biserial r=0,070, p&lt;0,001: kleiner Zusammenhang. Die Grafik zeigt drei Wetterklassen, der Test vergleicht stark gegen trocken und mässig zusammen. H2: Bus +0,212 und Bahn +0,214 Minuten. Interaktion −0,0017 Minuten, 95%-KI [−0,0299; 0,0264], p=0,904. H2 wird nicht gestützt.</a:t>
+              <a:t>Ca. 75 Sekunden. Stark bedeutet strikt mehr als 1,7 mm pro Stunde. Das ist das 90. Perzentil positiver Stationsstunden, vor dem Halt-Join berechnet. Vergleich stark gegen alle übrigen Halte: 1,613 statt 1,393 Minuten. Mann-Whitney-U prüft Verteilungsunterschiede; ergänzend Mittelwertdifferenz. Rang-biserial r=0,070, p&lt;0,001: kleiner Zusammenhang. Die Grafik zeigt drei Wetterklassen, der Test vergleicht stark gegen trocken und mässig zusammen. H2: Bus +0,212 und Bahn +0,214 Minuten. Interaktion −0,0017 Minuten, 95%-KI [−0,0299; 0,0264], p=0,904. H2 wird absolut nicht gestützt. Relativ ist es eher umgekehrt: Der Anteil verspäteter Halte steigt bei der Bahn von 5,5 auf 8,0 % (+45 %), beim Bus von 13,4 auf 16,5 % (+23 %), und r ist bei der Bahn grösser (0,103 statt 0,063). Die Mittelwerte steigen abgestuft von trocken über mässig zu stark, das stützt H1 zusätzlich.</a:t>
             </a:r>
           </a:p>
         </p:txBody>
@@ -1013,7 +1013,7 @@
           <a:lstStyle/>
           <a:p>
             <a:r>
-              <a:t>Ca. 60 Sekunden. HVZ Montag bis Freitag, 6 bis 9 und 16 bis 19 Uhr lokal, gesetzliche kantonale Feiertage ausgenommen. Während der HVZ ist das allgemeine Verspätungsniveau höher. Das ist aber etwas anderes als die Verstärkung des Wettereffekts: HVZ +0,208 gegenüber NVZ +0,268 Minuten. OLS-Interaktion −0,0603 Minuten, 95%-KI [−0,0816; −0,0389], p&lt;0,001. Die Richtung ist umgekehrt, die Differenz etwa 3,6 Sekunden. Die Regression nutzt alle bereinigten Halte, ohne Stichprobe.</a:t>
+              <a:t>Ca. 60 Sekunden. HVZ Montag bis Freitag, 6 bis 9 und 16 bis 19 Uhr lokal, gesetzliche kantonale Feiertage ausgenommen. Während der HVZ ist das allgemeine Verspätungsniveau höher. Das ist aber etwas anderes als die Verstärkung des Wettereffekts: HVZ +0,208 gegenüber NVZ +0,268 Minuten. OLS-Interaktion −0,0603 Minuten, 95%-KI [−0,0816; −0,0389], p&lt;0,001. Die Richtung ist umgekehrt, die Differenz etwa 3,6 Sekunden. Die Regression nutzt alle bereinigten Halte, ohne Stichprobe. Relativ: Anteil verspäteter Halte HVZ 19,2 → 22,9 % (+20 %), NVZ 9,5 → 13,1 % (+38 %).</a:t>
             </a:r>
           </a:p>
         </p:txBody>
@@ -1083,7 +1083,7 @@
           <a:lstStyle/>
           <a:p>
             <a:r>
-              <a:t>Ca. 60 Sekunden. Insgesamt hängt starker Niederschlag in diesem Winterquartal mit etwas höheren Ankunftsverspätungen zusammen. Kein stärkerer Effekt beim Bus oder in der HVZ. Keine Kausalität: Baustellen, Störungen und Nachfrage sind nicht kontrolliert. Halte derselben Fahrt sind abhängig; klassische p-Werte und Konfidenzintervalle können zu optimistisch sein. Schnee ergänzend nur +0,029 Minuten, r=0,014. Je nach Station wird Schneedecke oder Niederschlag bei Frost beobachtet, kein einheitlicher Schneefall. Die bereinigten Halte und eine Stundenaggregation stehen für Teil 2 bereit.</a:t>
+              <a:t>Ca. 60 Sekunden. Insgesamt hängt starker Niederschlag in diesem Winterquartal mit etwas höheren Ankunftsverspätungen zusammen. Kein stärkerer Effekt beim Bus oder in der HVZ. Keine Kausalität: Baustellen, Störungen und Nachfrage sind nicht kontrolliert. Halte derselben Fahrt sind abhängig; klassische p-Werte und Konfidenzintervalle können zu optimistisch sein. Schnee ergänzend nur +0,029 Minuten, r=0,014. Je nach Station wird Schneedecke oder Niederschlag bei Frost beobachtet, kein einheitlicher Schneefall. Die 47 Haltestellen ohne geeignete Station liegen alle auf rund 1000 m oder höher, also dort, wo Schnee am wichtigsten wäre. Ausgefallene Fahrten können wetterbedingt sein; weil sie ausgeschlossen sind, wird der Effekt eher unterschätzt (Ausfallquote nach Wetter für Teil 2). Die bereinigten Halte und eine Stundenaggregation stehen für Teil 2 bereit.</a:t>
             </a:r>
           </a:p>
         </p:txBody>
@@ -1643,7 +1643,7 @@
           <a:lstStyle/>
           <a:p>
             <a:r>
-              <a:t>Ca. 60 Sekunden. Forschungsfrage vorlesen, dann die drei Hypothesen. H1 fragt, ob es einen Effekt gibt, H2 und H3 fragen, ob er je nach Verkehrsmittel und Tageszeit unterschiedlich stark ist.</a:t>
+              <a:t>Ca. 60 Sekunden. Forschungsfrage vorlesen, dann die drei Hypothesen. H1 fragt, ob es einen Effekt gibt, H2 und H3 fragen, ob er je nach Verkehrsmittel und Tageszeit unterschiedlich stark ist. Zu H1: Der Test vergleicht starken Niederschlag mit allen übrigen Stunden. Schnee wird ergänzend nach demselben Vorgehen ausgewertet (Schneedecke oder Niederschlag bei Frost), weil SwissMetNet keinen einheitlichen Schneefall misst.</a:t>
             </a:r>
           </a:p>
         </p:txBody>
@@ -8587,7 +8587,7 @@
               </a:defRPr>
             </a:pPr>
             <a:r>
-              <a:t>Gruppe 4 · Enis · Paket C · 26.10.2026 | Quellen: MeteoSchweiz (2026), SBB/SKI (2026), swisstopo (2026)</a:t>
+              <a:t>Gruppe 4 · Enis · Paket C · 27.10.2026 | Quellen: MeteoSchweiz (2026), SBB/SKI (2026), swisstopo (2026)</a:t>
             </a:r>
           </a:p>
         </p:txBody>
@@ -9032,7 +9032,7 @@
               </a:defRPr>
             </a:pPr>
             <a:r>
-              <a:t>Gruppe 4 · Enis · Paket C · 26.10.2026 | Quellen: MeteoSchweiz (2026), SBB/SKI (2026), swisstopo (2026)</a:t>
+              <a:t>Gruppe 4 · Enis · Paket C · 27.10.2026 | Quellen: MeteoSchweiz (2026), SBB/SKI (2026), swisstopo (2026)</a:t>
             </a:r>
           </a:p>
         </p:txBody>
@@ -9384,7 +9384,7 @@
               </a:defRPr>
             </a:pPr>
             <a:r>
-              <a:t>Gruppe 4 · Enis · Paket C · 26.10.2026 | Quellen: MeteoSchweiz (2026), SBB/SKI (2026), swisstopo (2026)</a:t>
+              <a:t>Gruppe 4 · Enis · Paket C · 27.10.2026 | Quellen: MeteoSchweiz (2026), SBB/SKI (2026), swisstopo (2026)</a:t>
             </a:r>
           </a:p>
         </p:txBody>
@@ -9517,7 +9517,7 @@
               <a:spcAft>
                 <a:spcPts val="1200"/>
               </a:spcAft>
-              <a:defRPr sz="2000" b="0">
+              <a:defRPr sz="1800" b="0">
                 <a:solidFill>
                   <a:srgbClr val="17364A"/>
                 </a:solidFill>
@@ -9525,15 +9525,15 @@
               </a:defRPr>
             </a:pPr>
             <a:r>
-              <a:t>Stark: &gt; 1.7 mm/h</a:t>
-            </a:r>
-          </a:p>
-          <a:p>
-            <a:pPr>
-              <a:spcAft>
-                <a:spcPts val="1200"/>
-              </a:spcAft>
-              <a:defRPr sz="2000" b="0">
+              <a:t>Stark: &gt; 1,7 mm/h</a:t>
+            </a:r>
+          </a:p>
+          <a:p>
+            <a:pPr>
+              <a:spcAft>
+                <a:spcPts val="1200"/>
+              </a:spcAft>
+              <a:defRPr sz="1800" b="0">
                 <a:solidFill>
                   <a:srgbClr val="17364A"/>
                 </a:solidFill>
@@ -9549,7 +9549,7 @@
               <a:spcAft>
                 <a:spcPts val="1200"/>
               </a:spcAft>
-              <a:defRPr sz="2000" b="0">
+              <a:defRPr sz="1800" b="0">
                 <a:solidFill>
                   <a:srgbClr val="17364A"/>
                 </a:solidFill>
@@ -9565,7 +9565,7 @@
               <a:spcAft>
                 <a:spcPts val="1200"/>
               </a:spcAft>
-              <a:defRPr sz="2000" b="0">
+              <a:defRPr sz="1800" b="0">
                 <a:solidFill>
                   <a:srgbClr val="17364A"/>
                 </a:solidFill>
@@ -9573,23 +9573,7 @@
               </a:defRPr>
             </a:pPr>
             <a:r>
-              <a:t>H2 nicht gestützt:</a:t>
-            </a:r>
-          </a:p>
-          <a:p>
-            <a:pPr>
-              <a:spcAft>
-                <a:spcPts val="1200"/>
-              </a:spcAft>
-              <a:defRPr sz="2000" b="0">
-                <a:solidFill>
-                  <a:srgbClr val="17364A"/>
-                </a:solidFill>
-                <a:latin typeface="Aptos"/>
-              </a:defRPr>
-            </a:pPr>
-            <a:r>
-              <a:t>Fast gleicher Wettereffekt bei Bus und Bahn</a:t>
+              <a:t>H2 nicht gestützt: absolut gleicher Effekt (+0,21 Min.), relativ bei der Bahn eher stärker</a:t>
             </a:r>
           </a:p>
         </p:txBody>
@@ -9628,7 +9612,7 @@
               </a:defRPr>
             </a:pPr>
             <a:r>
-              <a:t>H1-Test: stark gegen sonst. Grafik: trocken / mässig / stark.</a:t>
+              <a:t>Abgestuft trocken → mässig → stark: Bus 1,45 → 1,61 → 1,69 Min. · Bahn 0,83 → 1,04 → 1,07 Min. (H1-Test: stark gegen sonst)</a:t>
             </a:r>
           </a:p>
         </p:txBody>
@@ -9775,7 +9759,7 @@
               </a:defRPr>
             </a:pPr>
             <a:r>
-              <a:t>Gruppe 4 · Enis · Paket C · 26.10.2026 | Quellen: MeteoSchweiz (2026), SBB/SKI (2026), swisstopo (2026)</a:t>
+              <a:t>Gruppe 4 · Enis · Paket C · 27.10.2026 | Quellen: MeteoSchweiz (2026), SBB/SKI (2026), swisstopo (2026)</a:t>
             </a:r>
           </a:p>
         </p:txBody>
@@ -9877,7 +9861,7 @@
               </a:defRPr>
             </a:pPr>
             <a:r>
-              <a:t>Wettereffekt stark vs. sonst:</a:t>
+              <a:t>Wettereffekt stark vs, sonst:</a:t>
             </a:r>
           </a:p>
           <a:p>
@@ -9925,7 +9909,7 @@
               </a:defRPr>
             </a:pPr>
             <a:r>
-              <a:t>Interaktion: -0.060 Minuten</a:t>
+              <a:t>Interaktion: -0,060 Minuten</a:t>
             </a:r>
           </a:p>
           <a:p>
@@ -10127,7 +10111,7 @@
               </a:defRPr>
             </a:pPr>
             <a:r>
-              <a:t>Gruppe 4 · Enis · Paket C · 26.10.2026 | Quellen: MeteoSchweiz (2026), SBB/SKI (2026), swisstopo (2026)</a:t>
+              <a:t>Gruppe 4 · Enis · Paket C · 27.10.2026 | Quellen: MeteoSchweiz (2026), SBB/SKI (2026), swisstopo (2026)</a:t>
             </a:r>
           </a:p>
         </p:txBody>
@@ -10197,7 +10181,7 @@
               <a:spcAft>
                 <a:spcPts val="1200"/>
               </a:spcAft>
-              <a:defRPr sz="2400" b="0">
+              <a:defRPr sz="2100" b="0">
                 <a:solidFill>
                   <a:srgbClr val="17364A"/>
                 </a:solidFill>
@@ -10213,7 +10197,7 @@
               <a:spcAft>
                 <a:spcPts val="1200"/>
               </a:spcAft>
-              <a:defRPr sz="2400" b="0">
+              <a:defRPr sz="2100" b="0">
                 <a:solidFill>
                   <a:srgbClr val="17364A"/>
                 </a:solidFill>
@@ -10229,7 +10213,7 @@
               <a:spcAft>
                 <a:spcPts val="1200"/>
               </a:spcAft>
-              <a:defRPr sz="2400" b="0">
+              <a:defRPr sz="2100" b="0">
                 <a:solidFill>
                   <a:srgbClr val="17364A"/>
                 </a:solidFill>
@@ -10238,6 +10222,22 @@
             </a:pPr>
             <a:r>
               <a:t>Halte derselben Fahrt sind nicht unabhängig</a:t>
+            </a:r>
+          </a:p>
+          <a:p>
+            <a:pPr>
+              <a:spcAft>
+                <a:spcPts val="1200"/>
+              </a:spcAft>
+              <a:defRPr sz="2100" b="0">
+                <a:solidFill>
+                  <a:srgbClr val="17364A"/>
+                </a:solidFill>
+                <a:latin typeface="Aptos"/>
+              </a:defRPr>
+            </a:pPr>
+            <a:r>
+              <a:t>Ausfälle ausgeschlossen: Effekt eher unterschätzt</a:t>
             </a:r>
           </a:p>
         </p:txBody>
@@ -10268,7 +10268,7 @@
               <a:spcAft>
                 <a:spcPts val="1200"/>
               </a:spcAft>
-              <a:defRPr sz="2400" b="0">
+              <a:defRPr sz="2100" b="0">
                 <a:solidFill>
                   <a:srgbClr val="17364A"/>
                 </a:solidFill>
@@ -10284,7 +10284,7 @@
               <a:spcAft>
                 <a:spcPts val="1200"/>
               </a:spcAft>
-              <a:defRPr sz="2400" b="0">
+              <a:defRPr sz="2100" b="0">
                 <a:solidFill>
                   <a:srgbClr val="17364A"/>
                 </a:solidFill>
@@ -10300,7 +10300,7 @@
               <a:spcAft>
                 <a:spcPts val="1200"/>
               </a:spcAft>
-              <a:defRPr sz="2400" b="0">
+              <a:defRPr sz="2100" b="0">
                 <a:solidFill>
                   <a:srgbClr val="17364A"/>
                 </a:solidFill>
@@ -10309,6 +10309,22 @@
             </a:pPr>
             <a:r>
               <a:t>Schneedecke und Frostniederschlag sind keine einheitliche Schneefallmessung</a:t>
+            </a:r>
+          </a:p>
+          <a:p>
+            <a:pPr>
+              <a:spcAft>
+                <a:spcPts val="1200"/>
+              </a:spcAft>
+              <a:defRPr sz="2100" b="0">
+                <a:solidFill>
+                  <a:srgbClr val="17364A"/>
+                </a:solidFill>
+                <a:latin typeface="Aptos"/>
+              </a:defRPr>
+            </a:pPr>
+            <a:r>
+              <a:t>47 Haltestellen ab ca. 1000 m ohne Station, gerade dort zählt Schnee</a:t>
             </a:r>
           </a:p>
         </p:txBody>
@@ -12387,7 +12403,7 @@
               </a:defRPr>
             </a:pPr>
             <a:r>
-              <a:t>Gruppe 4 · Enis · Paket C · 26.10.2026 | Quellen: MeteoSchweiz (2026), SBB/SKI (2026), swisstopo (2026)</a:t>
+              <a:t>Gruppe 4 · Enis · Paket C · 27.10.2026 | Quellen: MeteoSchweiz (2026), SBB/SKI (2026), swisstopo (2026)</a:t>
             </a:r>
           </a:p>
         </p:txBody>
@@ -14754,6 +14770,45 @@
             </a:pPr>
             <a:r>
               <a:t>Der Effekt ist in der Hauptverkehrszeit stärker als ausserhalb.</a:t>
+            </a:r>
+          </a:p>
+        </p:txBody>
+      </p:sp>
+      <p:sp>
+        <p:nvSpPr>
+          <p:cNvPr id="16" name="TextBox 15"/>
+          <p:cNvSpPr txBox="1"/>
+          <p:nvPr/>
+        </p:nvSpPr>
+        <p:spPr>
+          <a:xfrm>
+            <a:off x="502920" y="6053328"/>
+            <a:ext cx="11155680" cy="365760"/>
+          </a:xfrm>
+          <a:prstGeom prst="rect">
+            <a:avLst/>
+          </a:prstGeom>
+          <a:noFill/>
+        </p:spPr>
+        <p:txBody>
+          <a:bodyPr wrap="square">
+            <a:spAutoFit/>
+          </a:bodyPr>
+          <a:lstStyle/>
+          <a:p>
+            <a:pPr>
+              <a:spcAft>
+                <a:spcPts val="1200"/>
+              </a:spcAft>
+              <a:defRPr sz="1400" b="0" i="0">
+                <a:solidFill>
+                  <a:srgbClr val="53616B"/>
+                </a:solidFill>
+                <a:latin typeface="Aptos"/>
+              </a:defRPr>
+            </a:pPr>
+            <a:r>
+              <a:t>H1 wird mit starkem Niederschlag getestet; Schnee/Frost läuft als ergänzende Variable mit.</a:t>
             </a:r>
           </a:p>
         </p:txBody>

--- a/docs/präsentation/praesentation_gruppe4_teil1.pptx
+++ b/docs/präsentation/praesentation_gruppe4_teil1.pptx
@@ -1643,7 +1643,7 @@
           <a:lstStyle/>
           <a:p>
             <a:r>
-              <a:t>Ca. 60 Sekunden. Forschungsfrage vorlesen, dann die drei Hypothesen. H1 fragt, ob es einen Effekt gibt, H2 und H3 fragen, ob er je nach Verkehrsmittel und Tageszeit unterschiedlich stark ist. Zu H1: Der Test vergleicht starken Niederschlag mit allen übrigen Stunden. Schnee wird ergänzend nach demselben Vorgehen ausgewertet (Schneedecke oder Niederschlag bei Frost), weil SwissMetNet keinen einheitlichen Schneefall misst.</a:t>
+              <a:t>Ca. 60 Sekunden. Forschungsfrage vorlesen, dann die drei Hypothesen. H1 fragt, ob es einen Effekt gibt, H2 und H3 fragen, ob er je nach Verkehrsmittel und Tageszeit unterschiedlich stark ist. Zu H1: Der Test vergleicht starken Niederschlag mit allen übrigen Stunden. Schnee ist keine eigene Hypothese, er wird ergänzend nach demselben Vorgehen ausgewertet (Schneedecke oder Niederschlag bei Frost), weil SwissMetNet keinen einheitlichen Schneefall misst.</a:t>
             </a:r>
           </a:p>
         </p:txBody>
@@ -14521,7 +14521,7 @@
               </a:defRPr>
             </a:pPr>
             <a:r>
-              <a:t>Bei starkem Niederschlag oder Schnee ist die mittlere Verspätung höher als sonst.</a:t>
+              <a:t>Bei starkem Niederschlag ist die mittlere Verspätung höher als sonst.</a:t>
             </a:r>
           </a:p>
         </p:txBody>
@@ -14808,7 +14808,7 @@
               </a:defRPr>
             </a:pPr>
             <a:r>
-              <a:t>H1 wird mit starkem Niederschlag getestet; Schnee/Frost läuft als ergänzende Variable mit.</a:t>
+              <a:t>Ergänzend: Schnee/Frost (Schneedecke oder Niederschlag bei Frost), gleiches Vorgehen wie H1.</a:t>
             </a:r>
           </a:p>
         </p:txBody>

--- a/docs/präsentation/praesentation_gruppe4_teil1.pptx
+++ b/docs/präsentation/praesentation_gruppe4_teil1.pptx
@@ -25,8 +25,6 @@
     <p:sldId id="273" r:id="rId25"/>
     <p:sldId id="274" r:id="rId26"/>
     <p:sldId id="275" r:id="rId27"/>
-    <p:sldId id="276" r:id="rId28"/>
-    <p:sldId id="277" r:id="rId29"/>
   </p:sldIdLst>
   <p:sldSz cx="12191695" cy="6858000" type="screen4x3"/>
   <p:notesSz cx="6858000" cy="9144000"/>
@@ -523,7 +521,7 @@
           <a:lstStyle/>
           <a:p>
             <a:r>
-              <a:t>Begrüssung, Thema in einem Satz: Wir untersuchen, ob und wie stark Niederschlag, Schnee und Frost die Pünktlichkeit von Bahn und Bus in der Ostschweiz beeinflussen. Gesamtdauer des Referats: 15 Minuten, je ca. 5 Minuten pro Person.</a:t>
+              <a:t>Begrüssung, Thema in einem Satz: Wir untersuchen, ob und wie stark Niederschlag, Schnee und Frost die Pünktlichkeit von Bahn und Bus in der Ostschweiz beeinflussen. Danach stellen wir die drei Teile der Reihe nach vor.</a:t>
             </a:r>
           </a:p>
         </p:txBody>
@@ -1293,7 +1291,7 @@
           <a:lstStyle/>
           <a:p>
             <a:r>
-              <a:t>Ca. 30 Sekunden. Kurz den Ablauf nennen: Jede Person präsentiert einen eigenständigen Teil. Danach 7 Minuten Diskussion im Plenum.</a:t>
+              <a:t>Ca. 30 Sekunden. Kurz den Ablauf nennen: Jede Person präsentiert einen eigenständigen Teil. Danach Diskussion im Plenum.</a:t>
             </a:r>
           </a:p>
         </p:txBody>
@@ -1364,146 +1362,6 @@
           <a:p>
             <a:r>
               <a:t>Anhang, nicht Teil der fünf Minuten. Vollständige Links sind anklickbar.</a:t>
-            </a:r>
-          </a:p>
-        </p:txBody>
-      </p:sp>
-      <p:sp>
-        <p:nvSpPr>
-          <p:cNvPr id="4" name="Slide Number Placeholder 3"/>
-          <p:cNvSpPr>
-            <a:spLocks noGrp="1"/>
-          </p:cNvSpPr>
-          <p:nvPr>
-            <p:ph type="sldNum" idx="5" sz="quarter"/>
-          </p:nvPr>
-        </p:nvSpPr>
-        <p:spPr/>
-      </p:sp>
-    </p:spTree>
-  </p:cSld>
-  <p:clrMapOvr>
-    <a:masterClrMapping/>
-  </p:clrMapOvr>
-</p:notes>
-</file>
-
-<file path=ppt/notesSlides/notesSlide21.xml><?xml version="1.0" encoding="utf-8"?>
-<p:notes xmlns:a="http://schemas.openxmlformats.org/drawingml/2006/main" xmlns:p="http://schemas.openxmlformats.org/presentationml/2006/main" xmlns:r="http://schemas.openxmlformats.org/officeDocument/2006/relationships">
-  <p:cSld>
-    <p:spTree>
-      <p:nvGrpSpPr>
-        <p:cNvPr id="1" name=""/>
-        <p:cNvGrpSpPr/>
-        <p:nvPr/>
-      </p:nvGrpSpPr>
-      <p:grpSpPr>
-        <a:xfrm>
-          <a:off x="0" y="0"/>
-          <a:ext cx="0" cy="0"/>
-          <a:chOff x="0" y="0"/>
-          <a:chExt cx="0" cy="0"/>
-        </a:xfrm>
-      </p:grpSpPr>
-      <p:sp>
-        <p:nvSpPr>
-          <p:cNvPr id="2" name="Slide Image Placeholder 1"/>
-          <p:cNvSpPr>
-            <a:spLocks noGrp="1"/>
-          </p:cNvSpPr>
-          <p:nvPr>
-            <p:ph type="sldImg" idx="2"/>
-          </p:nvPr>
-        </p:nvSpPr>
-        <p:spPr/>
-      </p:sp>
-      <p:sp>
-        <p:nvSpPr>
-          <p:cNvPr id="3" name="Notes Placeholder 2"/>
-          <p:cNvSpPr>
-            <a:spLocks noGrp="1"/>
-          </p:cNvSpPr>
-          <p:nvPr>
-            <p:ph type="body" idx="3" sz="quarter"/>
-          </p:nvPr>
-        </p:nvSpPr>
-        <p:spPr/>
-        <p:txBody>
-          <a:bodyPr/>
-          <a:lstStyle/>
-          <a:p>
-            <a:r>
-              <a:t>Anhang, nicht Teil der fünf Minuten. Nur zeigen, falls gefragt.</a:t>
-            </a:r>
-          </a:p>
-        </p:txBody>
-      </p:sp>
-      <p:sp>
-        <p:nvSpPr>
-          <p:cNvPr id="4" name="Slide Number Placeholder 3"/>
-          <p:cNvSpPr>
-            <a:spLocks noGrp="1"/>
-          </p:cNvSpPr>
-          <p:nvPr>
-            <p:ph type="sldNum" idx="5" sz="quarter"/>
-          </p:nvPr>
-        </p:nvSpPr>
-        <p:spPr/>
-      </p:sp>
-    </p:spTree>
-  </p:cSld>
-  <p:clrMapOvr>
-    <a:masterClrMapping/>
-  </p:clrMapOvr>
-</p:notes>
-</file>
-
-<file path=ppt/notesSlides/notesSlide22.xml><?xml version="1.0" encoding="utf-8"?>
-<p:notes xmlns:a="http://schemas.openxmlformats.org/drawingml/2006/main" xmlns:p="http://schemas.openxmlformats.org/presentationml/2006/main" xmlns:r="http://schemas.openxmlformats.org/officeDocument/2006/relationships">
-  <p:cSld>
-    <p:spTree>
-      <p:nvGrpSpPr>
-        <p:cNvPr id="1" name=""/>
-        <p:cNvGrpSpPr/>
-        <p:nvPr/>
-      </p:nvGrpSpPr>
-      <p:grpSpPr>
-        <a:xfrm>
-          <a:off x="0" y="0"/>
-          <a:ext cx="0" cy="0"/>
-          <a:chOff x="0" y="0"/>
-          <a:chExt cx="0" cy="0"/>
-        </a:xfrm>
-      </p:grpSpPr>
-      <p:sp>
-        <p:nvSpPr>
-          <p:cNvPr id="2" name="Slide Image Placeholder 1"/>
-          <p:cNvSpPr>
-            <a:spLocks noGrp="1"/>
-          </p:cNvSpPr>
-          <p:nvPr>
-            <p:ph type="sldImg" idx="2"/>
-          </p:nvPr>
-        </p:nvSpPr>
-        <p:spPr/>
-      </p:sp>
-      <p:sp>
-        <p:nvSpPr>
-          <p:cNvPr id="3" name="Notes Placeholder 2"/>
-          <p:cNvSpPr>
-            <a:spLocks noGrp="1"/>
-          </p:cNvSpPr>
-          <p:nvPr>
-            <p:ph type="body" idx="3" sz="quarter"/>
-          </p:nvPr>
-        </p:nvSpPr>
-        <p:spPr/>
-        <p:txBody>
-          <a:bodyPr/>
-          <a:lstStyle/>
-          <a:p>
-            <a:r>
-              <a:t>Anhang, nicht Teil der fünf Minuten. Nur zeigen, falls gefragt.</a:t>
             </a:r>
           </a:p>
         </p:txBody>
@@ -5007,127 +4865,30 @@
         <p:nvPr/>
       </p:nvGrpSpPr>
       <p:grpSpPr/>
-      <p:sp>
-        <p:nvSpPr>
-          <p:cNvPr id="2" name="Rectangle 1"/>
-          <p:cNvSpPr/>
-          <p:nvPr/>
-        </p:nvSpPr>
+      <p:pic>
+        <p:nvPicPr>
+          <p:cNvPr id="9" name="Picture 8" descr="hintergrund_titel.png"/>
+          <p:cNvPicPr>
+            <a:picLocks noChangeAspect="1"/>
+          </p:cNvPicPr>
+          <p:nvPr/>
+        </p:nvPicPr>
+        <p:blipFill>
+          <a:blip r:embed="rId3"/>
+          <a:stretch>
+            <a:fillRect/>
+          </a:stretch>
+        </p:blipFill>
         <p:spPr>
           <a:xfrm>
             <a:off x="0" y="0"/>
-            <a:ext cx="12191695" cy="109728"/>
-          </a:xfrm>
-          <a:prstGeom prst="rect">
-            <a:avLst/>
-          </a:prstGeom>
-          <a:solidFill>
-            <a:srgbClr val="167D8D"/>
-          </a:solidFill>
-          <a:ln>
-            <a:noFill/>
-          </a:ln>
-        </p:spPr>
-        <p:style>
-          <a:lnRef idx="1">
-            <a:schemeClr val="accent1"/>
-          </a:lnRef>
-          <a:fillRef idx="3">
-            <a:schemeClr val="accent1"/>
-          </a:fillRef>
-          <a:effectRef idx="2">
-            <a:schemeClr val="accent1"/>
-          </a:effectRef>
-          <a:fontRef idx="minor">
-            <a:schemeClr val="lt1"/>
-          </a:fontRef>
-        </p:style>
-        <p:txBody>
-          <a:bodyPr rtlCol="0" anchor="ctr"/>
-          <a:lstStyle/>
-          <a:p>
-            <a:pPr algn="ctr"/>
-          </a:p>
-        </p:txBody>
-      </p:sp>
-      <p:sp>
-        <p:nvSpPr>
-          <p:cNvPr id="3" name="TextBox 2"/>
-          <p:cNvSpPr txBox="1"/>
-          <p:nvPr/>
-        </p:nvSpPr>
-        <p:spPr>
-          <a:xfrm>
-            <a:off x="457200" y="6473952"/>
-            <a:ext cx="10881360" cy="274320"/>
-          </a:xfrm>
-          <a:prstGeom prst="rect">
-            <a:avLst/>
-          </a:prstGeom>
-          <a:noFill/>
-        </p:spPr>
-        <p:txBody>
-          <a:bodyPr wrap="square">
-            <a:spAutoFit/>
-          </a:bodyPr>
-          <a:lstStyle/>
-          <a:p>
-            <a:pPr>
-              <a:spcAft>
-                <a:spcPts val="1200"/>
-              </a:spcAft>
-              <a:defRPr sz="1000" b="0" i="0">
-                <a:solidFill>
-                  <a:srgbClr val="53616B"/>
-                </a:solidFill>
-                <a:latin typeface="Aptos"/>
-              </a:defRPr>
-            </a:pPr>
-            <a:r>
-              <a:t>Gruppe 4 · Timon · Paket A · 27.10.2026 | Quellen: SBB AG (o. J.), Reis &amp; Housley (2022), DuckDB Foundation (2026)</a:t>
-            </a:r>
-          </a:p>
-        </p:txBody>
-      </p:sp>
-      <p:sp>
-        <p:nvSpPr>
-          <p:cNvPr id="4" name="TextBox 3"/>
-          <p:cNvSpPr txBox="1"/>
-          <p:nvPr/>
-        </p:nvSpPr>
-        <p:spPr>
-          <a:xfrm>
-            <a:off x="11338560" y="6455664"/>
-            <a:ext cx="457200" cy="274320"/>
-          </a:xfrm>
-          <a:prstGeom prst="rect">
-            <a:avLst/>
-          </a:prstGeom>
-          <a:noFill/>
-        </p:spPr>
-        <p:txBody>
-          <a:bodyPr wrap="square">
-            <a:spAutoFit/>
-          </a:bodyPr>
-          <a:lstStyle/>
-          <a:p>
-            <a:pPr>
-              <a:spcAft>
-                <a:spcPts val="1200"/>
-              </a:spcAft>
-              <a:defRPr sz="1100" b="0" i="0">
-                <a:solidFill>
-                  <a:srgbClr val="53616B"/>
-                </a:solidFill>
-                <a:latin typeface="Aptos"/>
-              </a:defRPr>
-            </a:pPr>
-            <a:r>
-              <a:t>1</a:t>
-            </a:r>
-          </a:p>
-        </p:txBody>
-      </p:sp>
+            <a:ext cx="12191695" cy="6858000"/>
+          </a:xfrm>
+          <a:prstGeom prst="rect">
+            <a:avLst/>
+          </a:prstGeom>
+        </p:spPr>
+      </p:pic>
       <p:sp>
         <p:nvSpPr>
           <p:cNvPr id="5" name="TextBox 4"/>
@@ -5136,25 +4897,25 @@
         </p:nvSpPr>
         <p:spPr>
           <a:xfrm>
-            <a:off x="502920" y="1371600"/>
-            <a:ext cx="11155680" cy="457200"/>
-          </a:xfrm>
-          <a:prstGeom prst="rect">
-            <a:avLst/>
-          </a:prstGeom>
-          <a:noFill/>
-        </p:spPr>
-        <p:txBody>
-          <a:bodyPr wrap="square">
-            <a:spAutoFit/>
-          </a:bodyPr>
-          <a:lstStyle/>
-          <a:p>
-            <a:pPr>
-              <a:spcAft>
-                <a:spcPts val="1200"/>
-              </a:spcAft>
-              <a:defRPr sz="2000" b="1" i="0">
+            <a:off x="502920" y="1188720"/>
+            <a:ext cx="6583680" cy="457200"/>
+          </a:xfrm>
+          <a:prstGeom prst="rect">
+            <a:avLst/>
+          </a:prstGeom>
+          <a:noFill/>
+        </p:spPr>
+        <p:txBody>
+          <a:bodyPr wrap="square">
+            <a:spAutoFit/>
+          </a:bodyPr>
+          <a:lstStyle/>
+          <a:p>
+            <a:pPr>
+              <a:spcAft>
+                <a:spcPts val="1200"/>
+              </a:spcAft>
+              <a:defRPr sz="1800" b="1" i="0">
                 <a:solidFill>
                   <a:srgbClr val="167D8D"/>
                 </a:solidFill>
@@ -5175,25 +4936,25 @@
         </p:nvSpPr>
         <p:spPr>
           <a:xfrm>
-            <a:off x="502920" y="2011680"/>
-            <a:ext cx="11155680" cy="2011680"/>
-          </a:xfrm>
-          <a:prstGeom prst="rect">
-            <a:avLst/>
-          </a:prstGeom>
-          <a:noFill/>
-        </p:spPr>
-        <p:txBody>
-          <a:bodyPr wrap="square">
-            <a:spAutoFit/>
-          </a:bodyPr>
-          <a:lstStyle/>
-          <a:p>
-            <a:pPr>
-              <a:spcAft>
-                <a:spcPts val="1200"/>
-              </a:spcAft>
-              <a:defRPr sz="4600" b="1" i="0">
+            <a:off x="502920" y="1691640"/>
+            <a:ext cx="6949440" cy="2194560"/>
+          </a:xfrm>
+          <a:prstGeom prst="rect">
+            <a:avLst/>
+          </a:prstGeom>
+          <a:noFill/>
+        </p:spPr>
+        <p:txBody>
+          <a:bodyPr wrap="square">
+            <a:spAutoFit/>
+          </a:bodyPr>
+          <a:lstStyle/>
+          <a:p>
+            <a:pPr>
+              <a:spcAft>
+                <a:spcPts val="0"/>
+              </a:spcAft>
+              <a:defRPr sz="4000" b="1" i="0">
                 <a:solidFill>
                   <a:srgbClr val="17364A"/>
                 </a:solidFill>
@@ -5214,25 +4975,25 @@
         </p:nvSpPr>
         <p:spPr>
           <a:xfrm>
-            <a:off x="502920" y="3931920"/>
-            <a:ext cx="11155680" cy="548640"/>
-          </a:xfrm>
-          <a:prstGeom prst="rect">
-            <a:avLst/>
-          </a:prstGeom>
-          <a:noFill/>
-        </p:spPr>
-        <p:txBody>
-          <a:bodyPr wrap="square">
-            <a:spAutoFit/>
-          </a:bodyPr>
-          <a:lstStyle/>
-          <a:p>
-            <a:pPr>
-              <a:spcAft>
-                <a:spcPts val="1200"/>
-              </a:spcAft>
-              <a:defRPr sz="2600" b="1" i="0">
+            <a:off x="502920" y="3429000"/>
+            <a:ext cx="7772400" cy="548640"/>
+          </a:xfrm>
+          <a:prstGeom prst="rect">
+            <a:avLst/>
+          </a:prstGeom>
+          <a:noFill/>
+        </p:spPr>
+        <p:txBody>
+          <a:bodyPr wrap="square">
+            <a:spAutoFit/>
+          </a:bodyPr>
+          <a:lstStyle/>
+          <a:p>
+            <a:pPr>
+              <a:spcAft>
+                <a:spcPts val="1200"/>
+              </a:spcAft>
+              <a:defRPr sz="2400" b="1" i="0">
                 <a:solidFill>
                   <a:srgbClr val="167D8D"/>
                 </a:solidFill>
@@ -5253,25 +5014,25 @@
         </p:nvSpPr>
         <p:spPr>
           <a:xfrm>
-            <a:off x="502920" y="4754880"/>
-            <a:ext cx="11155680" cy="457200"/>
-          </a:xfrm>
-          <a:prstGeom prst="rect">
-            <a:avLst/>
-          </a:prstGeom>
-          <a:noFill/>
-        </p:spPr>
-        <p:txBody>
-          <a:bodyPr wrap="square">
-            <a:spAutoFit/>
-          </a:bodyPr>
-          <a:lstStyle/>
-          <a:p>
-            <a:pPr>
-              <a:spcAft>
-                <a:spcPts val="1200"/>
-              </a:spcAft>
-              <a:defRPr sz="2200" b="0" i="0">
+            <a:off x="502920" y="4114800"/>
+            <a:ext cx="7772400" cy="457200"/>
+          </a:xfrm>
+          <a:prstGeom prst="rect">
+            <a:avLst/>
+          </a:prstGeom>
+          <a:noFill/>
+        </p:spPr>
+        <p:txBody>
+          <a:bodyPr wrap="square">
+            <a:spAutoFit/>
+          </a:bodyPr>
+          <a:lstStyle/>
+          <a:p>
+            <a:pPr>
+              <a:spcAft>
+                <a:spcPts val="1200"/>
+              </a:spcAft>
+              <a:defRPr sz="2000" b="0" i="0">
                 <a:solidFill>
                   <a:srgbClr val="17364A"/>
                 </a:solidFill>
@@ -5279,46 +5040,7 @@
               </a:defRPr>
             </a:pPr>
             <a:r>
-              <a:t>Gruppe 4: Timon, Aladin, Enis</a:t>
-            </a:r>
-          </a:p>
-        </p:txBody>
-      </p:sp>
-      <p:sp>
-        <p:nvSpPr>
-          <p:cNvPr id="9" name="TextBox 8"/>
-          <p:cNvSpPr txBox="1"/>
-          <p:nvPr/>
-        </p:nvSpPr>
-        <p:spPr>
-          <a:xfrm>
-            <a:off x="502920" y="5303520"/>
-            <a:ext cx="11155680" cy="457200"/>
-          </a:xfrm>
-          <a:prstGeom prst="rect">
-            <a:avLst/>
-          </a:prstGeom>
-          <a:noFill/>
-        </p:spPr>
-        <p:txBody>
-          <a:bodyPr wrap="square">
-            <a:spAutoFit/>
-          </a:bodyPr>
-          <a:lstStyle/>
-          <a:p>
-            <a:pPr>
-              <a:spcAft>
-                <a:spcPts val="1200"/>
-              </a:spcAft>
-              <a:defRPr sz="1800" b="0" i="0">
-                <a:solidFill>
-                  <a:srgbClr val="53616B"/>
-                </a:solidFill>
-                <a:latin typeface="Aptos"/>
-              </a:defRPr>
-            </a:pPr>
-            <a:r>
-              <a:t>Kolloquium 4. November 2026, 18:00 · Raum SW 111</a:t>
+              <a:t>Gruppe 4: Enis, Aladin, Timon Wallroth</a:t>
             </a:r>
           </a:p>
         </p:txBody>
@@ -5349,49 +5071,30 @@
         <p:nvPr/>
       </p:nvGrpSpPr>
       <p:grpSpPr/>
-      <p:sp>
-        <p:nvSpPr>
-          <p:cNvPr id="2" name="Rectangle 1"/>
-          <p:cNvSpPr/>
-          <p:nvPr/>
-        </p:nvSpPr>
+      <p:pic>
+        <p:nvPicPr>
+          <p:cNvPr id="8" name="Picture 7" descr="hintergrund_inhalt.png"/>
+          <p:cNvPicPr>
+            <a:picLocks noChangeAspect="1"/>
+          </p:cNvPicPr>
+          <p:nvPr/>
+        </p:nvPicPr>
+        <p:blipFill>
+          <a:blip r:embed="rId3"/>
+          <a:stretch>
+            <a:fillRect/>
+          </a:stretch>
+        </p:blipFill>
         <p:spPr>
           <a:xfrm>
             <a:off x="0" y="0"/>
-            <a:ext cx="12191695" cy="109728"/>
-          </a:xfrm>
-          <a:prstGeom prst="rect">
-            <a:avLst/>
-          </a:prstGeom>
-          <a:solidFill>
-            <a:srgbClr val="167D8D"/>
-          </a:solidFill>
-          <a:ln>
-            <a:noFill/>
-          </a:ln>
-        </p:spPr>
-        <p:style>
-          <a:lnRef idx="1">
-            <a:schemeClr val="accent1"/>
-          </a:lnRef>
-          <a:fillRef idx="3">
-            <a:schemeClr val="accent1"/>
-          </a:fillRef>
-          <a:effectRef idx="2">
-            <a:schemeClr val="accent1"/>
-          </a:effectRef>
-          <a:fontRef idx="minor">
-            <a:schemeClr val="lt1"/>
-          </a:fontRef>
-        </p:style>
-        <p:txBody>
-          <a:bodyPr rtlCol="0" anchor="ctr"/>
-          <a:lstStyle/>
-          <a:p>
-            <a:pPr algn="ctr"/>
-          </a:p>
-        </p:txBody>
-      </p:sp>
+            <a:ext cx="12191695" cy="6858000"/>
+          </a:xfrm>
+          <a:prstGeom prst="rect">
+            <a:avLst/>
+          </a:prstGeom>
+        </p:spPr>
+      </p:pic>
       <p:sp>
         <p:nvSpPr>
           <p:cNvPr id="3" name="TextBox 2"/>
@@ -5465,7 +5168,7 @@
               </a:defRPr>
             </a:pPr>
             <a:r>
-              <a:t>Gruppe 4 · Aladin · Paket B · 27.10.2026 | Quellen: SBB/SKI (2026), swisstopo (2026), DuckDB Foundation (2026)</a:t>
+              <a:t>Gruppe 4 · Aladin · Paket B | Quellen: SBB/SKI (2026), swisstopo (2026), DuckDB Foundation (2026)</a:t>
             </a:r>
           </a:p>
         </p:txBody>
@@ -6457,49 +6160,30 @@
         <p:nvPr/>
       </p:nvGrpSpPr>
       <p:grpSpPr/>
-      <p:sp>
-        <p:nvSpPr>
-          <p:cNvPr id="2" name="Rectangle 1"/>
-          <p:cNvSpPr/>
-          <p:nvPr/>
-        </p:nvSpPr>
+      <p:pic>
+        <p:nvPicPr>
+          <p:cNvPr id="32" name="Picture 31" descr="hintergrund_inhalt.png"/>
+          <p:cNvPicPr>
+            <a:picLocks noChangeAspect="1"/>
+          </p:cNvPicPr>
+          <p:nvPr/>
+        </p:nvPicPr>
+        <p:blipFill>
+          <a:blip r:embed="rId3"/>
+          <a:stretch>
+            <a:fillRect/>
+          </a:stretch>
+        </p:blipFill>
         <p:spPr>
           <a:xfrm>
             <a:off x="0" y="0"/>
-            <a:ext cx="12191695" cy="109728"/>
-          </a:xfrm>
-          <a:prstGeom prst="rect">
-            <a:avLst/>
-          </a:prstGeom>
-          <a:solidFill>
-            <a:srgbClr val="167D8D"/>
-          </a:solidFill>
-          <a:ln>
-            <a:noFill/>
-          </a:ln>
-        </p:spPr>
-        <p:style>
-          <a:lnRef idx="1">
-            <a:schemeClr val="accent1"/>
-          </a:lnRef>
-          <a:fillRef idx="3">
-            <a:schemeClr val="accent1"/>
-          </a:fillRef>
-          <a:effectRef idx="2">
-            <a:schemeClr val="accent1"/>
-          </a:effectRef>
-          <a:fontRef idx="minor">
-            <a:schemeClr val="lt1"/>
-          </a:fontRef>
-        </p:style>
-        <p:txBody>
-          <a:bodyPr rtlCol="0" anchor="ctr"/>
-          <a:lstStyle/>
-          <a:p>
-            <a:pPr algn="ctr"/>
-          </a:p>
-        </p:txBody>
-      </p:sp>
+            <a:ext cx="12191695" cy="6858000"/>
+          </a:xfrm>
+          <a:prstGeom prst="rect">
+            <a:avLst/>
+          </a:prstGeom>
+        </p:spPr>
+      </p:pic>
       <p:sp>
         <p:nvSpPr>
           <p:cNvPr id="3" name="TextBox 2"/>
@@ -6573,7 +6257,7 @@
               </a:defRPr>
             </a:pPr>
             <a:r>
-              <a:t>Gruppe 4 · Aladin · Paket B · 27.10.2026 | Quellen: SBB/SKI (2026), swisstopo (2026), DuckDB Foundation (2026)</a:t>
+              <a:t>Gruppe 4 · Aladin · Paket B | Quellen: SBB/SKI (2026), swisstopo (2026), DuckDB Foundation (2026)</a:t>
             </a:r>
           </a:p>
         </p:txBody>
@@ -7697,49 +7381,30 @@
         <p:nvPr/>
       </p:nvGrpSpPr>
       <p:grpSpPr/>
-      <p:sp>
-        <p:nvSpPr>
-          <p:cNvPr id="2" name="Rectangle 1"/>
-          <p:cNvSpPr/>
-          <p:nvPr/>
-        </p:nvSpPr>
+      <p:pic>
+        <p:nvPicPr>
+          <p:cNvPr id="8" name="Picture 7" descr="hintergrund_inhalt.png"/>
+          <p:cNvPicPr>
+            <a:picLocks noChangeAspect="1"/>
+          </p:cNvPicPr>
+          <p:nvPr/>
+        </p:nvPicPr>
+        <p:blipFill>
+          <a:blip r:embed="rId3"/>
+          <a:stretch>
+            <a:fillRect/>
+          </a:stretch>
+        </p:blipFill>
         <p:spPr>
           <a:xfrm>
             <a:off x="0" y="0"/>
-            <a:ext cx="12191695" cy="109728"/>
-          </a:xfrm>
-          <a:prstGeom prst="rect">
-            <a:avLst/>
-          </a:prstGeom>
-          <a:solidFill>
-            <a:srgbClr val="167D8D"/>
-          </a:solidFill>
-          <a:ln>
-            <a:noFill/>
-          </a:ln>
-        </p:spPr>
-        <p:style>
-          <a:lnRef idx="1">
-            <a:schemeClr val="accent1"/>
-          </a:lnRef>
-          <a:fillRef idx="3">
-            <a:schemeClr val="accent1"/>
-          </a:fillRef>
-          <a:effectRef idx="2">
-            <a:schemeClr val="accent1"/>
-          </a:effectRef>
-          <a:fontRef idx="minor">
-            <a:schemeClr val="lt1"/>
-          </a:fontRef>
-        </p:style>
-        <p:txBody>
-          <a:bodyPr rtlCol="0" anchor="ctr"/>
-          <a:lstStyle/>
-          <a:p>
-            <a:pPr algn="ctr"/>
-          </a:p>
-        </p:txBody>
-      </p:sp>
+            <a:ext cx="12191695" cy="6858000"/>
+          </a:xfrm>
+          <a:prstGeom prst="rect">
+            <a:avLst/>
+          </a:prstGeom>
+        </p:spPr>
+      </p:pic>
       <p:sp>
         <p:nvSpPr>
           <p:cNvPr id="3" name="TextBox 2"/>
@@ -7813,7 +7478,7 @@
               </a:defRPr>
             </a:pPr>
             <a:r>
-              <a:t>Gruppe 4 · Aladin · Paket B · 27.10.2026 | Quellen: SBB/SKI (2026), swisstopo (2026), DuckDB Foundation (2026)</a:t>
+              <a:t>Gruppe 4 · Aladin · Paket B | Quellen: SBB/SKI (2026), swisstopo (2026), DuckDB Foundation (2026)</a:t>
             </a:r>
           </a:p>
         </p:txBody>
@@ -8471,49 +8136,30 @@
         <p:nvPr/>
       </p:nvGrpSpPr>
       <p:grpSpPr/>
-      <p:sp>
-        <p:nvSpPr>
-          <p:cNvPr id="2" name="Rectangle 1"/>
-          <p:cNvSpPr/>
-          <p:nvPr/>
-        </p:nvSpPr>
+      <p:pic>
+        <p:nvPicPr>
+          <p:cNvPr id="11" name="Picture 10" descr="hintergrund_inhalt.png"/>
+          <p:cNvPicPr>
+            <a:picLocks noChangeAspect="1"/>
+          </p:cNvPicPr>
+          <p:nvPr/>
+        </p:nvPicPr>
+        <p:blipFill>
+          <a:blip r:embed="rId3"/>
+          <a:stretch>
+            <a:fillRect/>
+          </a:stretch>
+        </p:blipFill>
         <p:spPr>
           <a:xfrm>
             <a:off x="0" y="0"/>
-            <a:ext cx="12191695" cy="109728"/>
-          </a:xfrm>
-          <a:prstGeom prst="rect">
-            <a:avLst/>
-          </a:prstGeom>
-          <a:solidFill>
-            <a:srgbClr val="167D8D"/>
-          </a:solidFill>
-          <a:ln>
-            <a:noFill/>
-          </a:ln>
-        </p:spPr>
-        <p:style>
-          <a:lnRef idx="1">
-            <a:schemeClr val="accent1"/>
-          </a:lnRef>
-          <a:fillRef idx="3">
-            <a:schemeClr val="accent1"/>
-          </a:fillRef>
-          <a:effectRef idx="2">
-            <a:schemeClr val="accent1"/>
-          </a:effectRef>
-          <a:fontRef idx="minor">
-            <a:schemeClr val="lt1"/>
-          </a:fontRef>
-        </p:style>
-        <p:txBody>
-          <a:bodyPr rtlCol="0" anchor="ctr"/>
-          <a:lstStyle/>
-          <a:p>
-            <a:pPr algn="ctr"/>
-          </a:p>
-        </p:txBody>
-      </p:sp>
+            <a:ext cx="12191695" cy="6858000"/>
+          </a:xfrm>
+          <a:prstGeom prst="rect">
+            <a:avLst/>
+          </a:prstGeom>
+        </p:spPr>
+      </p:pic>
       <p:sp>
         <p:nvSpPr>
           <p:cNvPr id="3" name="TextBox 2"/>
@@ -8587,7 +8233,7 @@
               </a:defRPr>
             </a:pPr>
             <a:r>
-              <a:t>Gruppe 4 · Enis · Paket C · 27.10.2026 | Quellen: MeteoSchweiz (2026), SBB/SKI (2026), swisstopo (2026)</a:t>
+              <a:t>Gruppe 4 · Enis · Paket C | Quellen: MeteoSchweiz (2026), SBB/SKI (2026), swisstopo (2026)</a:t>
             </a:r>
           </a:p>
         </p:txBody>
@@ -8916,49 +8562,30 @@
         <p:nvPr/>
       </p:nvGrpSpPr>
       <p:grpSpPr/>
-      <p:sp>
-        <p:nvSpPr>
-          <p:cNvPr id="2" name="Rectangle 1"/>
-          <p:cNvSpPr/>
-          <p:nvPr/>
-        </p:nvSpPr>
+      <p:pic>
+        <p:nvPicPr>
+          <p:cNvPr id="9" name="Picture 8" descr="hintergrund_inhalt.png"/>
+          <p:cNvPicPr>
+            <a:picLocks noChangeAspect="1"/>
+          </p:cNvPicPr>
+          <p:nvPr/>
+        </p:nvPicPr>
+        <p:blipFill>
+          <a:blip r:embed="rId4"/>
+          <a:stretch>
+            <a:fillRect/>
+          </a:stretch>
+        </p:blipFill>
         <p:spPr>
           <a:xfrm>
             <a:off x="0" y="0"/>
-            <a:ext cx="12191695" cy="109728"/>
-          </a:xfrm>
-          <a:prstGeom prst="rect">
-            <a:avLst/>
-          </a:prstGeom>
-          <a:solidFill>
-            <a:srgbClr val="167D8D"/>
-          </a:solidFill>
-          <a:ln>
-            <a:noFill/>
-          </a:ln>
-        </p:spPr>
-        <p:style>
-          <a:lnRef idx="1">
-            <a:schemeClr val="accent1"/>
-          </a:lnRef>
-          <a:fillRef idx="3">
-            <a:schemeClr val="accent1"/>
-          </a:fillRef>
-          <a:effectRef idx="2">
-            <a:schemeClr val="accent1"/>
-          </a:effectRef>
-          <a:fontRef idx="minor">
-            <a:schemeClr val="lt1"/>
-          </a:fontRef>
-        </p:style>
-        <p:txBody>
-          <a:bodyPr rtlCol="0" anchor="ctr"/>
-          <a:lstStyle/>
-          <a:p>
-            <a:pPr algn="ctr"/>
-          </a:p>
-        </p:txBody>
-      </p:sp>
+            <a:ext cx="12191695" cy="6858000"/>
+          </a:xfrm>
+          <a:prstGeom prst="rect">
+            <a:avLst/>
+          </a:prstGeom>
+        </p:spPr>
+      </p:pic>
       <p:sp>
         <p:nvSpPr>
           <p:cNvPr id="3" name="TextBox 2"/>
@@ -9032,7 +8659,7 @@
               </a:defRPr>
             </a:pPr>
             <a:r>
-              <a:t>Gruppe 4 · Enis · Paket C · 27.10.2026 | Quellen: MeteoSchweiz (2026), SBB/SKI (2026), swisstopo (2026)</a:t>
+              <a:t>Gruppe 4 · Enis · Paket C | Quellen: MeteoSchweiz (2026), SBB/SKI (2026), swisstopo (2026)</a:t>
             </a:r>
           </a:p>
         </p:txBody>
@@ -9268,49 +8895,30 @@
         <p:nvPr/>
       </p:nvGrpSpPr>
       <p:grpSpPr/>
-      <p:sp>
-        <p:nvSpPr>
-          <p:cNvPr id="2" name="Rectangle 1"/>
-          <p:cNvSpPr/>
-          <p:nvPr/>
-        </p:nvSpPr>
+      <p:pic>
+        <p:nvPicPr>
+          <p:cNvPr id="10" name="Picture 9" descr="hintergrund_inhalt.png"/>
+          <p:cNvPicPr>
+            <a:picLocks noChangeAspect="1"/>
+          </p:cNvPicPr>
+          <p:nvPr/>
+        </p:nvPicPr>
+        <p:blipFill>
+          <a:blip r:embed="rId4"/>
+          <a:stretch>
+            <a:fillRect/>
+          </a:stretch>
+        </p:blipFill>
         <p:spPr>
           <a:xfrm>
             <a:off x="0" y="0"/>
-            <a:ext cx="12191695" cy="109728"/>
-          </a:xfrm>
-          <a:prstGeom prst="rect">
-            <a:avLst/>
-          </a:prstGeom>
-          <a:solidFill>
-            <a:srgbClr val="167D8D"/>
-          </a:solidFill>
-          <a:ln>
-            <a:noFill/>
-          </a:ln>
-        </p:spPr>
-        <p:style>
-          <a:lnRef idx="1">
-            <a:schemeClr val="accent1"/>
-          </a:lnRef>
-          <a:fillRef idx="3">
-            <a:schemeClr val="accent1"/>
-          </a:fillRef>
-          <a:effectRef idx="2">
-            <a:schemeClr val="accent1"/>
-          </a:effectRef>
-          <a:fontRef idx="minor">
-            <a:schemeClr val="lt1"/>
-          </a:fontRef>
-        </p:style>
-        <p:txBody>
-          <a:bodyPr rtlCol="0" anchor="ctr"/>
-          <a:lstStyle/>
-          <a:p>
-            <a:pPr algn="ctr"/>
-          </a:p>
-        </p:txBody>
-      </p:sp>
+            <a:ext cx="12191695" cy="6858000"/>
+          </a:xfrm>
+          <a:prstGeom prst="rect">
+            <a:avLst/>
+          </a:prstGeom>
+        </p:spPr>
+      </p:pic>
       <p:sp>
         <p:nvSpPr>
           <p:cNvPr id="3" name="TextBox 2"/>
@@ -9384,7 +8992,7 @@
               </a:defRPr>
             </a:pPr>
             <a:r>
-              <a:t>Gruppe 4 · Enis · Paket C · 27.10.2026 | Quellen: MeteoSchweiz (2026), SBB/SKI (2026), swisstopo (2026)</a:t>
+              <a:t>Gruppe 4 · Enis · Paket C | Quellen: MeteoSchweiz (2026), SBB/SKI (2026), swisstopo (2026)</a:t>
             </a:r>
           </a:p>
         </p:txBody>
@@ -9643,49 +9251,30 @@
         <p:nvPr/>
       </p:nvGrpSpPr>
       <p:grpSpPr/>
-      <p:sp>
-        <p:nvSpPr>
-          <p:cNvPr id="2" name="Rectangle 1"/>
-          <p:cNvSpPr/>
-          <p:nvPr/>
-        </p:nvSpPr>
+      <p:pic>
+        <p:nvPicPr>
+          <p:cNvPr id="9" name="Picture 8" descr="hintergrund_inhalt.png"/>
+          <p:cNvPicPr>
+            <a:picLocks noChangeAspect="1"/>
+          </p:cNvPicPr>
+          <p:nvPr/>
+        </p:nvPicPr>
+        <p:blipFill>
+          <a:blip r:embed="rId4"/>
+          <a:stretch>
+            <a:fillRect/>
+          </a:stretch>
+        </p:blipFill>
         <p:spPr>
           <a:xfrm>
             <a:off x="0" y="0"/>
-            <a:ext cx="12191695" cy="109728"/>
-          </a:xfrm>
-          <a:prstGeom prst="rect">
-            <a:avLst/>
-          </a:prstGeom>
-          <a:solidFill>
-            <a:srgbClr val="167D8D"/>
-          </a:solidFill>
-          <a:ln>
-            <a:noFill/>
-          </a:ln>
-        </p:spPr>
-        <p:style>
-          <a:lnRef idx="1">
-            <a:schemeClr val="accent1"/>
-          </a:lnRef>
-          <a:fillRef idx="3">
-            <a:schemeClr val="accent1"/>
-          </a:fillRef>
-          <a:effectRef idx="2">
-            <a:schemeClr val="accent1"/>
-          </a:effectRef>
-          <a:fontRef idx="minor">
-            <a:schemeClr val="lt1"/>
-          </a:fontRef>
-        </p:style>
-        <p:txBody>
-          <a:bodyPr rtlCol="0" anchor="ctr"/>
-          <a:lstStyle/>
-          <a:p>
-            <a:pPr algn="ctr"/>
-          </a:p>
-        </p:txBody>
-      </p:sp>
+            <a:ext cx="12191695" cy="6858000"/>
+          </a:xfrm>
+          <a:prstGeom prst="rect">
+            <a:avLst/>
+          </a:prstGeom>
+        </p:spPr>
+      </p:pic>
       <p:sp>
         <p:nvSpPr>
           <p:cNvPr id="3" name="TextBox 2"/>
@@ -9759,7 +9348,7 @@
               </a:defRPr>
             </a:pPr>
             <a:r>
-              <a:t>Gruppe 4 · Enis · Paket C · 27.10.2026 | Quellen: MeteoSchweiz (2026), SBB/SKI (2026), swisstopo (2026)</a:t>
+              <a:t>Gruppe 4 · Enis · Paket C | Quellen: MeteoSchweiz (2026), SBB/SKI (2026), swisstopo (2026)</a:t>
             </a:r>
           </a:p>
         </p:txBody>
@@ -9995,49 +9584,30 @@
         <p:nvPr/>
       </p:nvGrpSpPr>
       <p:grpSpPr/>
-      <p:sp>
-        <p:nvSpPr>
-          <p:cNvPr id="2" name="Rectangle 1"/>
-          <p:cNvSpPr/>
-          <p:nvPr/>
-        </p:nvSpPr>
+      <p:pic>
+        <p:nvPicPr>
+          <p:cNvPr id="9" name="Picture 8" descr="hintergrund_inhalt.png"/>
+          <p:cNvPicPr>
+            <a:picLocks noChangeAspect="1"/>
+          </p:cNvPicPr>
+          <p:nvPr/>
+        </p:nvPicPr>
+        <p:blipFill>
+          <a:blip r:embed="rId3"/>
+          <a:stretch>
+            <a:fillRect/>
+          </a:stretch>
+        </p:blipFill>
         <p:spPr>
           <a:xfrm>
             <a:off x="0" y="0"/>
-            <a:ext cx="12191695" cy="109728"/>
-          </a:xfrm>
-          <a:prstGeom prst="rect">
-            <a:avLst/>
-          </a:prstGeom>
-          <a:solidFill>
-            <a:srgbClr val="167D8D"/>
-          </a:solidFill>
-          <a:ln>
-            <a:noFill/>
-          </a:ln>
-        </p:spPr>
-        <p:style>
-          <a:lnRef idx="1">
-            <a:schemeClr val="accent1"/>
-          </a:lnRef>
-          <a:fillRef idx="3">
-            <a:schemeClr val="accent1"/>
-          </a:fillRef>
-          <a:effectRef idx="2">
-            <a:schemeClr val="accent1"/>
-          </a:effectRef>
-          <a:fontRef idx="minor">
-            <a:schemeClr val="lt1"/>
-          </a:fontRef>
-        </p:style>
-        <p:txBody>
-          <a:bodyPr rtlCol="0" anchor="ctr"/>
-          <a:lstStyle/>
-          <a:p>
-            <a:pPr algn="ctr"/>
-          </a:p>
-        </p:txBody>
-      </p:sp>
+            <a:ext cx="12191695" cy="6858000"/>
+          </a:xfrm>
+          <a:prstGeom prst="rect">
+            <a:avLst/>
+          </a:prstGeom>
+        </p:spPr>
+      </p:pic>
       <p:sp>
         <p:nvSpPr>
           <p:cNvPr id="3" name="TextBox 2"/>
@@ -10111,7 +9681,7 @@
               </a:defRPr>
             </a:pPr>
             <a:r>
-              <a:t>Gruppe 4 · Enis · Paket C · 27.10.2026 | Quellen: MeteoSchweiz (2026), SBB/SKI (2026), swisstopo (2026)</a:t>
+              <a:t>Gruppe 4 · Enis · Paket C | Quellen: MeteoSchweiz (2026), SBB/SKI (2026), swisstopo (2026)</a:t>
             </a:r>
           </a:p>
         </p:txBody>
@@ -10410,26 +9980,172 @@
         <p:nvPr/>
       </p:nvGrpSpPr>
       <p:grpSpPr/>
-      <p:sp>
-        <p:nvSpPr>
-          <p:cNvPr id="2" name="Rectangle 1"/>
+      <p:pic>
+        <p:nvPicPr>
+          <p:cNvPr id="16" name="Picture 15" descr="hintergrund_inhalt.png"/>
+          <p:cNvPicPr>
+            <a:picLocks noChangeAspect="1"/>
+          </p:cNvPicPr>
+          <p:nvPr/>
+        </p:nvPicPr>
+        <p:blipFill>
+          <a:blip r:embed="rId3"/>
+          <a:stretch>
+            <a:fillRect/>
+          </a:stretch>
+        </p:blipFill>
+        <p:spPr>
+          <a:xfrm>
+            <a:off x="0" y="0"/>
+            <a:ext cx="12191695" cy="6858000"/>
+          </a:xfrm>
+          <a:prstGeom prst="rect">
+            <a:avLst/>
+          </a:prstGeom>
+        </p:spPr>
+      </p:pic>
+      <p:sp>
+        <p:nvSpPr>
+          <p:cNvPr id="3" name="TextBox 2"/>
+          <p:cNvSpPr txBox="1"/>
+          <p:nvPr/>
+        </p:nvSpPr>
+        <p:spPr>
+          <a:xfrm>
+            <a:off x="457200" y="320040"/>
+            <a:ext cx="11247120" cy="548640"/>
+          </a:xfrm>
+          <a:prstGeom prst="rect">
+            <a:avLst/>
+          </a:prstGeom>
+          <a:noFill/>
+        </p:spPr>
+        <p:txBody>
+          <a:bodyPr wrap="square">
+            <a:spAutoFit/>
+          </a:bodyPr>
+          <a:lstStyle/>
+          <a:p>
+            <a:pPr>
+              <a:spcAft>
+                <a:spcPts val="1200"/>
+              </a:spcAft>
+              <a:defRPr sz="3000" b="1" i="0">
+                <a:solidFill>
+                  <a:srgbClr val="17364A"/>
+                </a:solidFill>
+                <a:latin typeface="Aptos"/>
+              </a:defRPr>
+            </a:pPr>
+            <a:r>
+              <a:t>Ausblick: Teil 2</a:t>
+            </a:r>
+          </a:p>
+        </p:txBody>
+      </p:sp>
+      <p:sp>
+        <p:nvSpPr>
+          <p:cNvPr id="4" name="TextBox 3"/>
+          <p:cNvSpPr txBox="1"/>
+          <p:nvPr/>
+        </p:nvSpPr>
+        <p:spPr>
+          <a:xfrm>
+            <a:off x="457200" y="6473952"/>
+            <a:ext cx="10881360" cy="274320"/>
+          </a:xfrm>
+          <a:prstGeom prst="rect">
+            <a:avLst/>
+          </a:prstGeom>
+          <a:noFill/>
+        </p:spPr>
+        <p:txBody>
+          <a:bodyPr wrap="square">
+            <a:spAutoFit/>
+          </a:bodyPr>
+          <a:lstStyle/>
+          <a:p>
+            <a:pPr>
+              <a:spcAft>
+                <a:spcPts val="1200"/>
+              </a:spcAft>
+              <a:defRPr sz="1000" b="0" i="0">
+                <a:solidFill>
+                  <a:srgbClr val="53616B"/>
+                </a:solidFill>
+                <a:latin typeface="Aptos"/>
+              </a:defRPr>
+            </a:pPr>
+            <a:r>
+              <a:t>Gruppe 4 · Timon · Paket A | Quellen: SBB AG (o. J.), Reis &amp; Housley (2022), DuckDB Foundation (2026)</a:t>
+            </a:r>
+          </a:p>
+        </p:txBody>
+      </p:sp>
+      <p:sp>
+        <p:nvSpPr>
+          <p:cNvPr id="5" name="TextBox 4"/>
+          <p:cNvSpPr txBox="1"/>
+          <p:nvPr/>
+        </p:nvSpPr>
+        <p:spPr>
+          <a:xfrm>
+            <a:off x="11338560" y="6455664"/>
+            <a:ext cx="457200" cy="274320"/>
+          </a:xfrm>
+          <a:prstGeom prst="rect">
+            <a:avLst/>
+          </a:prstGeom>
+          <a:noFill/>
+        </p:spPr>
+        <p:txBody>
+          <a:bodyPr wrap="square">
+            <a:spAutoFit/>
+          </a:bodyPr>
+          <a:lstStyle/>
+          <a:p>
+            <a:pPr>
+              <a:spcAft>
+                <a:spcPts val="1200"/>
+              </a:spcAft>
+              <a:defRPr sz="1100" b="0" i="0">
+                <a:solidFill>
+                  <a:srgbClr val="53616B"/>
+                </a:solidFill>
+                <a:latin typeface="Aptos"/>
+              </a:defRPr>
+            </a:pPr>
+            <a:r>
+              <a:t>18</a:t>
+            </a:r>
+          </a:p>
+        </p:txBody>
+      </p:sp>
+      <p:sp>
+        <p:nvSpPr>
+          <p:cNvPr id="6" name="Rounded Rectangle 5"/>
           <p:cNvSpPr/>
           <p:nvPr/>
         </p:nvSpPr>
         <p:spPr>
           <a:xfrm>
-            <a:off x="0" y="0"/>
-            <a:ext cx="12191695" cy="109728"/>
-          </a:xfrm>
-          <a:prstGeom prst="rect">
-            <a:avLst/>
+            <a:off x="502920" y="1371600"/>
+            <a:ext cx="3611880" cy="2926080"/>
+          </a:xfrm>
+          <a:prstGeom prst="roundRect">
+            <a:avLst>
+              <a:gd name="adj" fmla="val 6000"/>
+            </a:avLst>
           </a:prstGeom>
           <a:solidFill>
-            <a:srgbClr val="167D8D"/>
+            <a:srgbClr val="FFFFFF"/>
           </a:solidFill>
-          <a:ln>
-            <a:noFill/>
+          <a:ln w="15875">
+            <a:solidFill>
+              <a:srgbClr val="167D8D"/>
+            </a:solidFill>
           </a:ln>
+          <a:effectLst/>
         </p:spPr>
         <p:style>
           <a:lnRef idx="1">
@@ -10455,31 +10171,70 @@
       </p:sp>
       <p:sp>
         <p:nvSpPr>
-          <p:cNvPr id="3" name="TextBox 2"/>
-          <p:cNvSpPr txBox="1"/>
-          <p:nvPr/>
-        </p:nvSpPr>
-        <p:spPr>
-          <a:xfrm>
-            <a:off x="457200" y="320040"/>
-            <a:ext cx="11247120" cy="548640"/>
-          </a:xfrm>
-          <a:prstGeom prst="rect">
-            <a:avLst/>
-          </a:prstGeom>
-          <a:noFill/>
-        </p:spPr>
-        <p:txBody>
-          <a:bodyPr wrap="square">
-            <a:spAutoFit/>
-          </a:bodyPr>
-          <a:lstStyle/>
-          <a:p>
-            <a:pPr>
-              <a:spcAft>
-                <a:spcPts val="1200"/>
-              </a:spcAft>
-              <a:defRPr sz="3000" b="1" i="0">
+          <p:cNvPr id="7" name="TextBox 6"/>
+          <p:cNvSpPr txBox="1"/>
+          <p:nvPr/>
+        </p:nvSpPr>
+        <p:spPr>
+          <a:xfrm>
+            <a:off x="731520" y="1600200"/>
+            <a:ext cx="3200400" cy="548640"/>
+          </a:xfrm>
+          <a:prstGeom prst="rect">
+            <a:avLst/>
+          </a:prstGeom>
+          <a:noFill/>
+        </p:spPr>
+        <p:txBody>
+          <a:bodyPr wrap="square">
+            <a:spAutoFit/>
+          </a:bodyPr>
+          <a:lstStyle/>
+          <a:p>
+            <a:pPr>
+              <a:spcAft>
+                <a:spcPts val="1200"/>
+              </a:spcAft>
+              <a:defRPr sz="2600" b="1" i="0">
+                <a:solidFill>
+                  <a:srgbClr val="167D8D"/>
+                </a:solidFill>
+                <a:latin typeface="Aptos"/>
+              </a:defRPr>
+            </a:pPr>
+            <a:r>
+              <a:t>Transformation</a:t>
+            </a:r>
+          </a:p>
+        </p:txBody>
+      </p:sp>
+      <p:sp>
+        <p:nvSpPr>
+          <p:cNvPr id="8" name="TextBox 7"/>
+          <p:cNvSpPr txBox="1"/>
+          <p:nvPr/>
+        </p:nvSpPr>
+        <p:spPr>
+          <a:xfrm>
+            <a:off x="731520" y="2377440"/>
+            <a:ext cx="3200400" cy="1737360"/>
+          </a:xfrm>
+          <a:prstGeom prst="rect">
+            <a:avLst/>
+          </a:prstGeom>
+          <a:noFill/>
+        </p:spPr>
+        <p:txBody>
+          <a:bodyPr wrap="square">
+            <a:spAutoFit/>
+          </a:bodyPr>
+          <a:lstStyle/>
+          <a:p>
+            <a:pPr>
+              <a:spcAft>
+                <a:spcPts val="1200"/>
+              </a:spcAft>
+              <a:defRPr sz="2000" b="0" i="0">
                 <a:solidFill>
                   <a:srgbClr val="17364A"/>
                 </a:solidFill>
@@ -10487,98 +10242,20 @@
               </a:defRPr>
             </a:pPr>
             <a:r>
-              <a:t>Ausblick: Teil 2</a:t>
-            </a:r>
-          </a:p>
-        </p:txBody>
-      </p:sp>
-      <p:sp>
-        <p:nvSpPr>
-          <p:cNvPr id="4" name="TextBox 3"/>
-          <p:cNvSpPr txBox="1"/>
-          <p:nvPr/>
-        </p:nvSpPr>
-        <p:spPr>
-          <a:xfrm>
-            <a:off x="457200" y="6473952"/>
-            <a:ext cx="10881360" cy="274320"/>
-          </a:xfrm>
-          <a:prstGeom prst="rect">
-            <a:avLst/>
-          </a:prstGeom>
-          <a:noFill/>
-        </p:spPr>
-        <p:txBody>
-          <a:bodyPr wrap="square">
-            <a:spAutoFit/>
-          </a:bodyPr>
-          <a:lstStyle/>
-          <a:p>
-            <a:pPr>
-              <a:spcAft>
-                <a:spcPts val="1200"/>
-              </a:spcAft>
-              <a:defRPr sz="1000" b="0" i="0">
-                <a:solidFill>
-                  <a:srgbClr val="53616B"/>
-                </a:solidFill>
-                <a:latin typeface="Aptos"/>
-              </a:defRPr>
-            </a:pPr>
-            <a:r>
-              <a:t>Gruppe 4 · Timon · Paket A · 27.10.2026 | Quellen: SBB AG (o. J.), Reis &amp; Housley (2022), DuckDB Foundation (2026)</a:t>
-            </a:r>
-          </a:p>
-        </p:txBody>
-      </p:sp>
-      <p:sp>
-        <p:nvSpPr>
-          <p:cNvPr id="5" name="TextBox 4"/>
-          <p:cNvSpPr txBox="1"/>
-          <p:nvPr/>
-        </p:nvSpPr>
-        <p:spPr>
-          <a:xfrm>
-            <a:off x="11338560" y="6455664"/>
-            <a:ext cx="457200" cy="274320"/>
-          </a:xfrm>
-          <a:prstGeom prst="rect">
-            <a:avLst/>
-          </a:prstGeom>
-          <a:noFill/>
-        </p:spPr>
-        <p:txBody>
-          <a:bodyPr wrap="square">
-            <a:spAutoFit/>
-          </a:bodyPr>
-          <a:lstStyle/>
-          <a:p>
-            <a:pPr>
-              <a:spcAft>
-                <a:spcPts val="1200"/>
-              </a:spcAft>
-              <a:defRPr sz="1100" b="0" i="0">
-                <a:solidFill>
-                  <a:srgbClr val="53616B"/>
-                </a:solidFill>
-                <a:latin typeface="Aptos"/>
-              </a:defRPr>
-            </a:pPr>
-            <a:r>
-              <a:t>18</a:t>
-            </a:r>
-          </a:p>
-        </p:txBody>
-      </p:sp>
-      <p:sp>
-        <p:nvSpPr>
-          <p:cNvPr id="6" name="Rounded Rectangle 5"/>
+              <a:t>Feedback aus Teil 1 einarbeiten, finale Antwort auf die Forschungsfrage</a:t>
+            </a:r>
+          </a:p>
+        </p:txBody>
+      </p:sp>
+      <p:sp>
+        <p:nvSpPr>
+          <p:cNvPr id="9" name="Rounded Rectangle 8"/>
           <p:cNvSpPr/>
           <p:nvPr/>
         </p:nvSpPr>
         <p:spPr>
           <a:xfrm>
-            <a:off x="502920" y="1371600"/>
+            <a:off x="4297680" y="1371600"/>
             <a:ext cx="3611880" cy="2926080"/>
           </a:xfrm>
           <a:prstGeom prst="roundRect">
@@ -10620,13 +10297,13 @@
       </p:sp>
       <p:sp>
         <p:nvSpPr>
-          <p:cNvPr id="7" name="TextBox 6"/>
-          <p:cNvSpPr txBox="1"/>
-          <p:nvPr/>
-        </p:nvSpPr>
-        <p:spPr>
-          <a:xfrm>
-            <a:off x="731520" y="1600200"/>
+          <p:cNvPr id="10" name="TextBox 9"/>
+          <p:cNvSpPr txBox="1"/>
+          <p:nvPr/>
+        </p:nvSpPr>
+        <p:spPr>
+          <a:xfrm>
+            <a:off x="4526280" y="1600200"/>
             <a:ext cx="3200400" cy="548640"/>
           </a:xfrm>
           <a:prstGeom prst="rect">
@@ -10652,20 +10329,20 @@
               </a:defRPr>
             </a:pPr>
             <a:r>
-              <a:t>Transformation</a:t>
-            </a:r>
-          </a:p>
-        </p:txBody>
-      </p:sp>
-      <p:sp>
-        <p:nvSpPr>
-          <p:cNvPr id="8" name="TextBox 7"/>
-          <p:cNvSpPr txBox="1"/>
-          <p:nvPr/>
-        </p:nvSpPr>
-        <p:spPr>
-          <a:xfrm>
-            <a:off x="731520" y="2377440"/>
+              <a:t>Serving</a:t>
+            </a:r>
+          </a:p>
+        </p:txBody>
+      </p:sp>
+      <p:sp>
+        <p:nvSpPr>
+          <p:cNvPr id="11" name="TextBox 10"/>
+          <p:cNvSpPr txBox="1"/>
+          <p:nvPr/>
+        </p:nvSpPr>
+        <p:spPr>
+          <a:xfrm>
+            <a:off x="4526280" y="2377440"/>
             <a:ext cx="3200400" cy="1737360"/>
           </a:xfrm>
           <a:prstGeom prst="rect">
@@ -10691,20 +10368,20 @@
               </a:defRPr>
             </a:pPr>
             <a:r>
-              <a:t>Feedback aus Teil 1 einarbeiten, finale Antwort auf die Forschungsfrage</a:t>
-            </a:r>
-          </a:p>
-        </p:txBody>
-      </p:sp>
-      <p:sp>
-        <p:nvSpPr>
-          <p:cNvPr id="9" name="Rounded Rectangle 8"/>
+              <a:t>Web-Dashboard mit Karte, Zeitreihen und Wetterfiltern</a:t>
+            </a:r>
+          </a:p>
+        </p:txBody>
+      </p:sp>
+      <p:sp>
+        <p:nvSpPr>
+          <p:cNvPr id="12" name="Rounded Rectangle 11"/>
           <p:cNvSpPr/>
           <p:nvPr/>
         </p:nvSpPr>
         <p:spPr>
           <a:xfrm>
-            <a:off x="4297680" y="1371600"/>
+            <a:off x="8092440" y="1371600"/>
             <a:ext cx="3611880" cy="2926080"/>
           </a:xfrm>
           <a:prstGeom prst="roundRect">
@@ -10746,132 +10423,6 @@
       </p:sp>
       <p:sp>
         <p:nvSpPr>
-          <p:cNvPr id="10" name="TextBox 9"/>
-          <p:cNvSpPr txBox="1"/>
-          <p:nvPr/>
-        </p:nvSpPr>
-        <p:spPr>
-          <a:xfrm>
-            <a:off x="4526280" y="1600200"/>
-            <a:ext cx="3200400" cy="548640"/>
-          </a:xfrm>
-          <a:prstGeom prst="rect">
-            <a:avLst/>
-          </a:prstGeom>
-          <a:noFill/>
-        </p:spPr>
-        <p:txBody>
-          <a:bodyPr wrap="square">
-            <a:spAutoFit/>
-          </a:bodyPr>
-          <a:lstStyle/>
-          <a:p>
-            <a:pPr>
-              <a:spcAft>
-                <a:spcPts val="1200"/>
-              </a:spcAft>
-              <a:defRPr sz="2600" b="1" i="0">
-                <a:solidFill>
-                  <a:srgbClr val="167D8D"/>
-                </a:solidFill>
-                <a:latin typeface="Aptos"/>
-              </a:defRPr>
-            </a:pPr>
-            <a:r>
-              <a:t>Serving</a:t>
-            </a:r>
-          </a:p>
-        </p:txBody>
-      </p:sp>
-      <p:sp>
-        <p:nvSpPr>
-          <p:cNvPr id="11" name="TextBox 10"/>
-          <p:cNvSpPr txBox="1"/>
-          <p:nvPr/>
-        </p:nvSpPr>
-        <p:spPr>
-          <a:xfrm>
-            <a:off x="4526280" y="2377440"/>
-            <a:ext cx="3200400" cy="1737360"/>
-          </a:xfrm>
-          <a:prstGeom prst="rect">
-            <a:avLst/>
-          </a:prstGeom>
-          <a:noFill/>
-        </p:spPr>
-        <p:txBody>
-          <a:bodyPr wrap="square">
-            <a:spAutoFit/>
-          </a:bodyPr>
-          <a:lstStyle/>
-          <a:p>
-            <a:pPr>
-              <a:spcAft>
-                <a:spcPts val="1200"/>
-              </a:spcAft>
-              <a:defRPr sz="2000" b="0" i="0">
-                <a:solidFill>
-                  <a:srgbClr val="17364A"/>
-                </a:solidFill>
-                <a:latin typeface="Aptos"/>
-              </a:defRPr>
-            </a:pPr>
-            <a:r>
-              <a:t>Web-Dashboard mit Karte, Zeitreihen und Wetterfiltern</a:t>
-            </a:r>
-          </a:p>
-        </p:txBody>
-      </p:sp>
-      <p:sp>
-        <p:nvSpPr>
-          <p:cNvPr id="12" name="Rounded Rectangle 11"/>
-          <p:cNvSpPr/>
-          <p:nvPr/>
-        </p:nvSpPr>
-        <p:spPr>
-          <a:xfrm>
-            <a:off x="8092440" y="1371600"/>
-            <a:ext cx="3611880" cy="2926080"/>
-          </a:xfrm>
-          <a:prstGeom prst="roundRect">
-            <a:avLst>
-              <a:gd name="adj" fmla="val 6000"/>
-            </a:avLst>
-          </a:prstGeom>
-          <a:solidFill>
-            <a:srgbClr val="FFFFFF"/>
-          </a:solidFill>
-          <a:ln w="15875">
-            <a:solidFill>
-              <a:srgbClr val="167D8D"/>
-            </a:solidFill>
-          </a:ln>
-          <a:effectLst/>
-        </p:spPr>
-        <p:style>
-          <a:lnRef idx="1">
-            <a:schemeClr val="accent1"/>
-          </a:lnRef>
-          <a:fillRef idx="3">
-            <a:schemeClr val="accent1"/>
-          </a:fillRef>
-          <a:effectRef idx="2">
-            <a:schemeClr val="accent1"/>
-          </a:effectRef>
-          <a:fontRef idx="minor">
-            <a:schemeClr val="lt1"/>
-          </a:fontRef>
-        </p:style>
-        <p:txBody>
-          <a:bodyPr rtlCol="0" anchor="ctr"/>
-          <a:lstStyle/>
-          <a:p>
-            <a:pPr algn="ctr"/>
-          </a:p>
-        </p:txBody>
-      </p:sp>
-      <p:sp>
-        <p:nvSpPr>
           <p:cNvPr id="13" name="TextBox 12"/>
           <p:cNvSpPr txBox="1"/>
           <p:nvPr/>
@@ -10982,7 +10533,7 @@
               </a:defRPr>
             </a:pPr>
             <a:r>
-              <a:t>Abgabe Teil 2: 8. Dezember 2026 · Fragen und Diskussion (7 Minuten)</a:t>
+              <a:t>Fragen und Diskussion</a:t>
             </a:r>
           </a:p>
         </p:txBody>
@@ -11013,49 +10564,30 @@
         <p:nvPr/>
       </p:nvGrpSpPr>
       <p:grpSpPr/>
-      <p:sp>
-        <p:nvSpPr>
-          <p:cNvPr id="2" name="Rectangle 1"/>
-          <p:cNvSpPr/>
-          <p:nvPr/>
-        </p:nvSpPr>
+      <p:pic>
+        <p:nvPicPr>
+          <p:cNvPr id="13" name="Picture 12" descr="hintergrund_inhalt.png"/>
+          <p:cNvPicPr>
+            <a:picLocks noChangeAspect="1"/>
+          </p:cNvPicPr>
+          <p:nvPr/>
+        </p:nvPicPr>
+        <p:blipFill>
+          <a:blip r:embed="rId8"/>
+          <a:stretch>
+            <a:fillRect/>
+          </a:stretch>
+        </p:blipFill>
         <p:spPr>
           <a:xfrm>
             <a:off x="0" y="0"/>
-            <a:ext cx="12191695" cy="109728"/>
-          </a:xfrm>
-          <a:prstGeom prst="rect">
-            <a:avLst/>
-          </a:prstGeom>
-          <a:solidFill>
-            <a:srgbClr val="167D8D"/>
-          </a:solidFill>
-          <a:ln>
-            <a:noFill/>
-          </a:ln>
-        </p:spPr>
-        <p:style>
-          <a:lnRef idx="1">
-            <a:schemeClr val="accent1"/>
-          </a:lnRef>
-          <a:fillRef idx="3">
-            <a:schemeClr val="accent1"/>
-          </a:fillRef>
-          <a:effectRef idx="2">
-            <a:schemeClr val="accent1"/>
-          </a:effectRef>
-          <a:fontRef idx="minor">
-            <a:schemeClr val="lt1"/>
-          </a:fontRef>
-        </p:style>
-        <p:txBody>
-          <a:bodyPr rtlCol="0" anchor="ctr"/>
-          <a:lstStyle/>
-          <a:p>
-            <a:pPr algn="ctr"/>
-          </a:p>
-        </p:txBody>
-      </p:sp>
+            <a:ext cx="12191695" cy="6858000"/>
+          </a:xfrm>
+          <a:prstGeom prst="rect">
+            <a:avLst/>
+          </a:prstGeom>
+        </p:spPr>
+      </p:pic>
       <p:sp>
         <p:nvSpPr>
           <p:cNvPr id="3" name="TextBox 2"/>
@@ -11129,7 +10661,7 @@
               </a:defRPr>
             </a:pPr>
             <a:r>
-              <a:t>Gruppe 4 · Timon · Paket A · 27.10.2026 | Quellen: SBB AG (o. J.), Reis &amp; Housley (2022), DuckDB Foundation (2026)</a:t>
+              <a:t>Gruppe 4 · Timon · Paket A | Quellen: SBB AG (o. J.), Reis &amp; Housley (2022), DuckDB Foundation (2026)</a:t>
             </a:r>
           </a:p>
         </p:txBody>
@@ -11567,26 +11099,172 @@
         <p:nvPr/>
       </p:nvGrpSpPr>
       <p:grpSpPr/>
-      <p:sp>
-        <p:nvSpPr>
-          <p:cNvPr id="2" name="Rectangle 1"/>
+      <p:pic>
+        <p:nvPicPr>
+          <p:cNvPr id="19" name="Picture 18" descr="hintergrund_inhalt.png"/>
+          <p:cNvPicPr>
+            <a:picLocks noChangeAspect="1"/>
+          </p:cNvPicPr>
+          <p:nvPr/>
+        </p:nvPicPr>
+        <p:blipFill>
+          <a:blip r:embed="rId3"/>
+          <a:stretch>
+            <a:fillRect/>
+          </a:stretch>
+        </p:blipFill>
+        <p:spPr>
+          <a:xfrm>
+            <a:off x="0" y="0"/>
+            <a:ext cx="12191695" cy="6858000"/>
+          </a:xfrm>
+          <a:prstGeom prst="rect">
+            <a:avLst/>
+          </a:prstGeom>
+        </p:spPr>
+      </p:pic>
+      <p:sp>
+        <p:nvSpPr>
+          <p:cNvPr id="3" name="TextBox 2"/>
+          <p:cNvSpPr txBox="1"/>
+          <p:nvPr/>
+        </p:nvSpPr>
+        <p:spPr>
+          <a:xfrm>
+            <a:off x="457200" y="320040"/>
+            <a:ext cx="11247120" cy="548640"/>
+          </a:xfrm>
+          <a:prstGeom prst="rect">
+            <a:avLst/>
+          </a:prstGeom>
+          <a:noFill/>
+        </p:spPr>
+        <p:txBody>
+          <a:bodyPr wrap="square">
+            <a:spAutoFit/>
+          </a:bodyPr>
+          <a:lstStyle/>
+          <a:p>
+            <a:pPr>
+              <a:spcAft>
+                <a:spcPts val="1200"/>
+              </a:spcAft>
+              <a:defRPr sz="3000" b="1" i="0">
+                <a:solidFill>
+                  <a:srgbClr val="17364A"/>
+                </a:solidFill>
+                <a:latin typeface="Aptos"/>
+              </a:defRPr>
+            </a:pPr>
+            <a:r>
+              <a:t>Aufbau des Referats</a:t>
+            </a:r>
+          </a:p>
+        </p:txBody>
+      </p:sp>
+      <p:sp>
+        <p:nvSpPr>
+          <p:cNvPr id="4" name="TextBox 3"/>
+          <p:cNvSpPr txBox="1"/>
+          <p:nvPr/>
+        </p:nvSpPr>
+        <p:spPr>
+          <a:xfrm>
+            <a:off x="457200" y="6473952"/>
+            <a:ext cx="10881360" cy="274320"/>
+          </a:xfrm>
+          <a:prstGeom prst="rect">
+            <a:avLst/>
+          </a:prstGeom>
+          <a:noFill/>
+        </p:spPr>
+        <p:txBody>
+          <a:bodyPr wrap="square">
+            <a:spAutoFit/>
+          </a:bodyPr>
+          <a:lstStyle/>
+          <a:p>
+            <a:pPr>
+              <a:spcAft>
+                <a:spcPts val="1200"/>
+              </a:spcAft>
+              <a:defRPr sz="1000" b="0" i="0">
+                <a:solidFill>
+                  <a:srgbClr val="53616B"/>
+                </a:solidFill>
+                <a:latin typeface="Aptos"/>
+              </a:defRPr>
+            </a:pPr>
+            <a:r>
+              <a:t>Gruppe 4 · Timon · Paket A | Quellen: SBB AG (o. J.), Reis &amp; Housley (2022), DuckDB Foundation (2026)</a:t>
+            </a:r>
+          </a:p>
+        </p:txBody>
+      </p:sp>
+      <p:sp>
+        <p:nvSpPr>
+          <p:cNvPr id="5" name="TextBox 4"/>
+          <p:cNvSpPr txBox="1"/>
+          <p:nvPr/>
+        </p:nvSpPr>
+        <p:spPr>
+          <a:xfrm>
+            <a:off x="11338560" y="6455664"/>
+            <a:ext cx="457200" cy="274320"/>
+          </a:xfrm>
+          <a:prstGeom prst="rect">
+            <a:avLst/>
+          </a:prstGeom>
+          <a:noFill/>
+        </p:spPr>
+        <p:txBody>
+          <a:bodyPr wrap="square">
+            <a:spAutoFit/>
+          </a:bodyPr>
+          <a:lstStyle/>
+          <a:p>
+            <a:pPr>
+              <a:spcAft>
+                <a:spcPts val="1200"/>
+              </a:spcAft>
+              <a:defRPr sz="1100" b="0" i="0">
+                <a:solidFill>
+                  <a:srgbClr val="53616B"/>
+                </a:solidFill>
+                <a:latin typeface="Aptos"/>
+              </a:defRPr>
+            </a:pPr>
+            <a:r>
+              <a:t>2</a:t>
+            </a:r>
+          </a:p>
+        </p:txBody>
+      </p:sp>
+      <p:sp>
+        <p:nvSpPr>
+          <p:cNvPr id="6" name="Rounded Rectangle 5"/>
           <p:cNvSpPr/>
           <p:nvPr/>
         </p:nvSpPr>
         <p:spPr>
           <a:xfrm>
-            <a:off x="0" y="0"/>
-            <a:ext cx="12191695" cy="109728"/>
-          </a:xfrm>
-          <a:prstGeom prst="rect">
-            <a:avLst/>
+            <a:off x="502920" y="1371600"/>
+            <a:ext cx="3611880" cy="3291840"/>
+          </a:xfrm>
+          <a:prstGeom prst="roundRect">
+            <a:avLst>
+              <a:gd name="adj" fmla="val 6000"/>
+            </a:avLst>
           </a:prstGeom>
           <a:solidFill>
-            <a:srgbClr val="167D8D"/>
+            <a:srgbClr val="FFFFFF"/>
           </a:solidFill>
-          <a:ln>
-            <a:noFill/>
+          <a:ln w="15875">
+            <a:solidFill>
+              <a:srgbClr val="167D8D"/>
+            </a:solidFill>
           </a:ln>
+          <a:effectLst/>
         </p:spPr>
         <p:style>
           <a:lnRef idx="1">
@@ -11612,31 +11290,70 @@
       </p:sp>
       <p:sp>
         <p:nvSpPr>
-          <p:cNvPr id="3" name="TextBox 2"/>
-          <p:cNvSpPr txBox="1"/>
-          <p:nvPr/>
-        </p:nvSpPr>
-        <p:spPr>
-          <a:xfrm>
-            <a:off x="457200" y="320040"/>
-            <a:ext cx="11247120" cy="548640"/>
-          </a:xfrm>
-          <a:prstGeom prst="rect">
-            <a:avLst/>
-          </a:prstGeom>
-          <a:noFill/>
-        </p:spPr>
-        <p:txBody>
-          <a:bodyPr wrap="square">
-            <a:spAutoFit/>
-          </a:bodyPr>
-          <a:lstStyle/>
-          <a:p>
-            <a:pPr>
-              <a:spcAft>
-                <a:spcPts val="1200"/>
-              </a:spcAft>
-              <a:defRPr sz="3000" b="1" i="0">
+          <p:cNvPr id="7" name="TextBox 6"/>
+          <p:cNvSpPr txBox="1"/>
+          <p:nvPr/>
+        </p:nvSpPr>
+        <p:spPr>
+          <a:xfrm>
+            <a:off x="731520" y="1600200"/>
+            <a:ext cx="3200400" cy="457200"/>
+          </a:xfrm>
+          <a:prstGeom prst="rect">
+            <a:avLst/>
+          </a:prstGeom>
+          <a:noFill/>
+        </p:spPr>
+        <p:txBody>
+          <a:bodyPr wrap="square">
+            <a:spAutoFit/>
+          </a:bodyPr>
+          <a:lstStyle/>
+          <a:p>
+            <a:pPr>
+              <a:spcAft>
+                <a:spcPts val="1200"/>
+              </a:spcAft>
+              <a:defRPr sz="2000" b="1" i="0">
+                <a:solidFill>
+                  <a:srgbClr val="167D8D"/>
+                </a:solidFill>
+                <a:latin typeface="Aptos"/>
+              </a:defRPr>
+            </a:pPr>
+            <a:r>
+              <a:t>Paket A · Timon</a:t>
+            </a:r>
+          </a:p>
+        </p:txBody>
+      </p:sp>
+      <p:sp>
+        <p:nvSpPr>
+          <p:cNvPr id="8" name="TextBox 7"/>
+          <p:cNvSpPr txBox="1"/>
+          <p:nvPr/>
+        </p:nvSpPr>
+        <p:spPr>
+          <a:xfrm>
+            <a:off x="731520" y="2240280"/>
+            <a:ext cx="3200400" cy="640080"/>
+          </a:xfrm>
+          <a:prstGeom prst="rect">
+            <a:avLst/>
+          </a:prstGeom>
+          <a:noFill/>
+        </p:spPr>
+        <p:txBody>
+          <a:bodyPr wrap="square">
+            <a:spAutoFit/>
+          </a:bodyPr>
+          <a:lstStyle/>
+          <a:p>
+            <a:pPr>
+              <a:spcAft>
+                <a:spcPts val="1200"/>
+              </a:spcAft>
+              <a:defRPr sz="2600" b="1" i="0">
                 <a:solidFill>
                   <a:srgbClr val="17364A"/>
                 </a:solidFill>
@@ -11644,38 +11361,38 @@
               </a:defRPr>
             </a:pPr>
             <a:r>
-              <a:t>Drei Pakete, je ca. 5 Minuten</a:t>
-            </a:r>
-          </a:p>
-        </p:txBody>
-      </p:sp>
-      <p:sp>
-        <p:nvSpPr>
-          <p:cNvPr id="4" name="TextBox 3"/>
-          <p:cNvSpPr txBox="1"/>
-          <p:nvPr/>
-        </p:nvSpPr>
-        <p:spPr>
-          <a:xfrm>
-            <a:off x="457200" y="6473952"/>
-            <a:ext cx="10881360" cy="274320"/>
-          </a:xfrm>
-          <a:prstGeom prst="rect">
-            <a:avLst/>
-          </a:prstGeom>
-          <a:noFill/>
-        </p:spPr>
-        <p:txBody>
-          <a:bodyPr wrap="square">
-            <a:spAutoFit/>
-          </a:bodyPr>
-          <a:lstStyle/>
-          <a:p>
-            <a:pPr>
-              <a:spcAft>
-                <a:spcPts val="1200"/>
-              </a:spcAft>
-              <a:defRPr sz="1000" b="0" i="0">
+              <a:t>Konzept und Rahmen</a:t>
+            </a:r>
+          </a:p>
+        </p:txBody>
+      </p:sp>
+      <p:sp>
+        <p:nvSpPr>
+          <p:cNvPr id="9" name="TextBox 8"/>
+          <p:cNvSpPr txBox="1"/>
+          <p:nvPr/>
+        </p:nvSpPr>
+        <p:spPr>
+          <a:xfrm>
+            <a:off x="731520" y="3291840"/>
+            <a:ext cx="3200400" cy="1280160"/>
+          </a:xfrm>
+          <a:prstGeom prst="rect">
+            <a:avLst/>
+          </a:prstGeom>
+          <a:noFill/>
+        </p:spPr>
+        <p:txBody>
+          <a:bodyPr wrap="square">
+            <a:spAutoFit/>
+          </a:bodyPr>
+          <a:lstStyle/>
+          <a:p>
+            <a:pPr>
+              <a:spcAft>
+                <a:spcPts val="1200"/>
+              </a:spcAft>
+              <a:defRPr sz="1900" b="0" i="0">
                 <a:solidFill>
                   <a:srgbClr val="53616B"/>
                 </a:solidFill>
@@ -11683,59 +11400,20 @@
               </a:defRPr>
             </a:pPr>
             <a:r>
-              <a:t>Gruppe 4 · Timon · Paket A · 27.10.2026 | Quellen: SBB AG (o. J.), Reis &amp; Housley (2022), DuckDB Foundation (2026)</a:t>
-            </a:r>
-          </a:p>
-        </p:txBody>
-      </p:sp>
-      <p:sp>
-        <p:nvSpPr>
-          <p:cNvPr id="5" name="TextBox 4"/>
-          <p:cNvSpPr txBox="1"/>
-          <p:nvPr/>
-        </p:nvSpPr>
-        <p:spPr>
-          <a:xfrm>
-            <a:off x="11338560" y="6455664"/>
-            <a:ext cx="457200" cy="274320"/>
-          </a:xfrm>
-          <a:prstGeom prst="rect">
-            <a:avLst/>
-          </a:prstGeom>
-          <a:noFill/>
-        </p:spPr>
-        <p:txBody>
-          <a:bodyPr wrap="square">
-            <a:spAutoFit/>
-          </a:bodyPr>
-          <a:lstStyle/>
-          <a:p>
-            <a:pPr>
-              <a:spcAft>
-                <a:spcPts val="1200"/>
-              </a:spcAft>
-              <a:defRPr sz="1100" b="0" i="0">
-                <a:solidFill>
-                  <a:srgbClr val="53616B"/>
-                </a:solidFill>
-                <a:latin typeface="Aptos"/>
-              </a:defRPr>
-            </a:pPr>
-            <a:r>
-              <a:t>2</a:t>
-            </a:r>
-          </a:p>
-        </p:txBody>
-      </p:sp>
-      <p:sp>
-        <p:nvSpPr>
-          <p:cNvPr id="6" name="Rounded Rectangle 5"/>
+              <a:t>Problemstellung, Forschungsfrage, Hypothesen, Methodik, Lifecycle</a:t>
+            </a:r>
+          </a:p>
+        </p:txBody>
+      </p:sp>
+      <p:sp>
+        <p:nvSpPr>
+          <p:cNvPr id="10" name="Rounded Rectangle 9"/>
           <p:cNvSpPr/>
           <p:nvPr/>
         </p:nvSpPr>
         <p:spPr>
           <a:xfrm>
-            <a:off x="502920" y="1371600"/>
+            <a:off x="4297680" y="1371600"/>
             <a:ext cx="3611880" cy="3291840"/>
           </a:xfrm>
           <a:prstGeom prst="roundRect">
@@ -11777,13 +11455,13 @@
       </p:sp>
       <p:sp>
         <p:nvSpPr>
-          <p:cNvPr id="7" name="TextBox 6"/>
-          <p:cNvSpPr txBox="1"/>
-          <p:nvPr/>
-        </p:nvSpPr>
-        <p:spPr>
-          <a:xfrm>
-            <a:off x="731520" y="1600200"/>
+          <p:cNvPr id="11" name="TextBox 10"/>
+          <p:cNvSpPr txBox="1"/>
+          <p:nvPr/>
+        </p:nvSpPr>
+        <p:spPr>
+          <a:xfrm>
+            <a:off x="4526280" y="1600200"/>
             <a:ext cx="3200400" cy="457200"/>
           </a:xfrm>
           <a:prstGeom prst="rect">
@@ -11809,20 +11487,20 @@
               </a:defRPr>
             </a:pPr>
             <a:r>
-              <a:t>Paket A · Timon</a:t>
-            </a:r>
-          </a:p>
-        </p:txBody>
-      </p:sp>
-      <p:sp>
-        <p:nvSpPr>
-          <p:cNvPr id="8" name="TextBox 7"/>
-          <p:cNvSpPr txBox="1"/>
-          <p:nvPr/>
-        </p:nvSpPr>
-        <p:spPr>
-          <a:xfrm>
-            <a:off x="731520" y="2240280"/>
+              <a:t>Paket B · Aladin</a:t>
+            </a:r>
+          </a:p>
+        </p:txBody>
+      </p:sp>
+      <p:sp>
+        <p:nvSpPr>
+          <p:cNvPr id="12" name="TextBox 11"/>
+          <p:cNvSpPr txBox="1"/>
+          <p:nvPr/>
+        </p:nvSpPr>
+        <p:spPr>
+          <a:xfrm>
+            <a:off x="4526280" y="2240280"/>
             <a:ext cx="3200400" cy="640080"/>
           </a:xfrm>
           <a:prstGeom prst="rect">
@@ -11848,20 +11526,20 @@
               </a:defRPr>
             </a:pPr>
             <a:r>
-              <a:t>Konzept und Rahmen</a:t>
-            </a:r>
-          </a:p>
-        </p:txBody>
-      </p:sp>
-      <p:sp>
-        <p:nvSpPr>
-          <p:cNvPr id="9" name="TextBox 8"/>
-          <p:cNvSpPr txBox="1"/>
-          <p:nvPr/>
-        </p:nvSpPr>
-        <p:spPr>
-          <a:xfrm>
-            <a:off x="731520" y="3291840"/>
+              <a:t>Datenbeschaffung und Speicherung</a:t>
+            </a:r>
+          </a:p>
+        </p:txBody>
+      </p:sp>
+      <p:sp>
+        <p:nvSpPr>
+          <p:cNvPr id="13" name="TextBox 12"/>
+          <p:cNvSpPr txBox="1"/>
+          <p:nvPr/>
+        </p:nvSpPr>
+        <p:spPr>
+          <a:xfrm>
+            <a:off x="4526280" y="3291840"/>
             <a:ext cx="3200400" cy="1280160"/>
           </a:xfrm>
           <a:prstGeom prst="rect">
@@ -11887,20 +11565,20 @@
               </a:defRPr>
             </a:pPr>
             <a:r>
-              <a:t>Problemstellung, Forschungsfrage, Hypothesen, Methodik, Lifecycle</a:t>
-            </a:r>
-          </a:p>
-        </p:txBody>
-      </p:sp>
-      <p:sp>
-        <p:nvSpPr>
-          <p:cNvPr id="10" name="Rounded Rectangle 9"/>
+              <a:t>Ist-Daten, Ingestion, Storage-Entscheid, Datenmodell</a:t>
+            </a:r>
+          </a:p>
+        </p:txBody>
+      </p:sp>
+      <p:sp>
+        <p:nvSpPr>
+          <p:cNvPr id="14" name="Rounded Rectangle 13"/>
           <p:cNvSpPr/>
           <p:nvPr/>
         </p:nvSpPr>
         <p:spPr>
           <a:xfrm>
-            <a:off x="4297680" y="1371600"/>
+            <a:off x="8092440" y="1371600"/>
             <a:ext cx="3611880" cy="3291840"/>
           </a:xfrm>
           <a:prstGeom prst="roundRect">
@@ -11942,171 +11620,6 @@
       </p:sp>
       <p:sp>
         <p:nvSpPr>
-          <p:cNvPr id="11" name="TextBox 10"/>
-          <p:cNvSpPr txBox="1"/>
-          <p:nvPr/>
-        </p:nvSpPr>
-        <p:spPr>
-          <a:xfrm>
-            <a:off x="4526280" y="1600200"/>
-            <a:ext cx="3200400" cy="457200"/>
-          </a:xfrm>
-          <a:prstGeom prst="rect">
-            <a:avLst/>
-          </a:prstGeom>
-          <a:noFill/>
-        </p:spPr>
-        <p:txBody>
-          <a:bodyPr wrap="square">
-            <a:spAutoFit/>
-          </a:bodyPr>
-          <a:lstStyle/>
-          <a:p>
-            <a:pPr>
-              <a:spcAft>
-                <a:spcPts val="1200"/>
-              </a:spcAft>
-              <a:defRPr sz="2000" b="1" i="0">
-                <a:solidFill>
-                  <a:srgbClr val="167D8D"/>
-                </a:solidFill>
-                <a:latin typeface="Aptos"/>
-              </a:defRPr>
-            </a:pPr>
-            <a:r>
-              <a:t>Paket B · Aladin</a:t>
-            </a:r>
-          </a:p>
-        </p:txBody>
-      </p:sp>
-      <p:sp>
-        <p:nvSpPr>
-          <p:cNvPr id="12" name="TextBox 11"/>
-          <p:cNvSpPr txBox="1"/>
-          <p:nvPr/>
-        </p:nvSpPr>
-        <p:spPr>
-          <a:xfrm>
-            <a:off x="4526280" y="2240280"/>
-            <a:ext cx="3200400" cy="640080"/>
-          </a:xfrm>
-          <a:prstGeom prst="rect">
-            <a:avLst/>
-          </a:prstGeom>
-          <a:noFill/>
-        </p:spPr>
-        <p:txBody>
-          <a:bodyPr wrap="square">
-            <a:spAutoFit/>
-          </a:bodyPr>
-          <a:lstStyle/>
-          <a:p>
-            <a:pPr>
-              <a:spcAft>
-                <a:spcPts val="1200"/>
-              </a:spcAft>
-              <a:defRPr sz="2600" b="1" i="0">
-                <a:solidFill>
-                  <a:srgbClr val="17364A"/>
-                </a:solidFill>
-                <a:latin typeface="Aptos"/>
-              </a:defRPr>
-            </a:pPr>
-            <a:r>
-              <a:t>Daten rein</a:t>
-            </a:r>
-          </a:p>
-        </p:txBody>
-      </p:sp>
-      <p:sp>
-        <p:nvSpPr>
-          <p:cNvPr id="13" name="TextBox 12"/>
-          <p:cNvSpPr txBox="1"/>
-          <p:nvPr/>
-        </p:nvSpPr>
-        <p:spPr>
-          <a:xfrm>
-            <a:off x="4526280" y="3291840"/>
-            <a:ext cx="3200400" cy="1280160"/>
-          </a:xfrm>
-          <a:prstGeom prst="rect">
-            <a:avLst/>
-          </a:prstGeom>
-          <a:noFill/>
-        </p:spPr>
-        <p:txBody>
-          <a:bodyPr wrap="square">
-            <a:spAutoFit/>
-          </a:bodyPr>
-          <a:lstStyle/>
-          <a:p>
-            <a:pPr>
-              <a:spcAft>
-                <a:spcPts val="1200"/>
-              </a:spcAft>
-              <a:defRPr sz="1900" b="0" i="0">
-                <a:solidFill>
-                  <a:srgbClr val="53616B"/>
-                </a:solidFill>
-                <a:latin typeface="Aptos"/>
-              </a:defRPr>
-            </a:pPr>
-            <a:r>
-              <a:t>Ist-Daten, Ingestion, Storage-Entscheid, Datenmodell</a:t>
-            </a:r>
-          </a:p>
-        </p:txBody>
-      </p:sp>
-      <p:sp>
-        <p:nvSpPr>
-          <p:cNvPr id="14" name="Rounded Rectangle 13"/>
-          <p:cNvSpPr/>
-          <p:nvPr/>
-        </p:nvSpPr>
-        <p:spPr>
-          <a:xfrm>
-            <a:off x="8092440" y="1371600"/>
-            <a:ext cx="3611880" cy="3291840"/>
-          </a:xfrm>
-          <a:prstGeom prst="roundRect">
-            <a:avLst>
-              <a:gd name="adj" fmla="val 6000"/>
-            </a:avLst>
-          </a:prstGeom>
-          <a:solidFill>
-            <a:srgbClr val="FFFFFF"/>
-          </a:solidFill>
-          <a:ln w="15875">
-            <a:solidFill>
-              <a:srgbClr val="167D8D"/>
-            </a:solidFill>
-          </a:ln>
-          <a:effectLst/>
-        </p:spPr>
-        <p:style>
-          <a:lnRef idx="1">
-            <a:schemeClr val="accent1"/>
-          </a:lnRef>
-          <a:fillRef idx="3">
-            <a:schemeClr val="accent1"/>
-          </a:fillRef>
-          <a:effectRef idx="2">
-            <a:schemeClr val="accent1"/>
-          </a:effectRef>
-          <a:fontRef idx="minor">
-            <a:schemeClr val="lt1"/>
-          </a:fontRef>
-        </p:style>
-        <p:txBody>
-          <a:bodyPr rtlCol="0" anchor="ctr"/>
-          <a:lstStyle/>
-          <a:p>
-            <a:pPr algn="ctr"/>
-          </a:p>
-        </p:txBody>
-      </p:sp>
-      <p:sp>
-        <p:nvSpPr>
           <p:cNvPr id="15" name="TextBox 14"/>
           <p:cNvSpPr txBox="1"/>
           <p:nvPr/>
@@ -12256,7 +11769,7 @@
               </a:defRPr>
             </a:pPr>
             <a:r>
-              <a:t>Danach: Fragen und Diskussion im Plenum (7 Minuten)</a:t>
+              <a:t>Danach: Fragen und Diskussion im Plenum</a:t>
             </a:r>
           </a:p>
         </p:txBody>
@@ -12287,49 +11800,30 @@
         <p:nvPr/>
       </p:nvGrpSpPr>
       <p:grpSpPr/>
-      <p:sp>
-        <p:nvSpPr>
-          <p:cNvPr id="2" name="Rectangle 1"/>
-          <p:cNvSpPr/>
-          <p:nvPr/>
-        </p:nvSpPr>
+      <p:pic>
+        <p:nvPicPr>
+          <p:cNvPr id="10" name="Picture 9" descr="hintergrund_inhalt.png"/>
+          <p:cNvPicPr>
+            <a:picLocks noChangeAspect="1"/>
+          </p:cNvPicPr>
+          <p:nvPr/>
+        </p:nvPicPr>
+        <p:blipFill>
+          <a:blip r:embed="rId7"/>
+          <a:stretch>
+            <a:fillRect/>
+          </a:stretch>
+        </p:blipFill>
         <p:spPr>
           <a:xfrm>
             <a:off x="0" y="0"/>
-            <a:ext cx="12191695" cy="109728"/>
-          </a:xfrm>
-          <a:prstGeom prst="rect">
-            <a:avLst/>
-          </a:prstGeom>
-          <a:solidFill>
-            <a:srgbClr val="167D8D"/>
-          </a:solidFill>
-          <a:ln>
-            <a:noFill/>
-          </a:ln>
-        </p:spPr>
-        <p:style>
-          <a:lnRef idx="1">
-            <a:schemeClr val="accent1"/>
-          </a:lnRef>
-          <a:fillRef idx="3">
-            <a:schemeClr val="accent1"/>
-          </a:fillRef>
-          <a:effectRef idx="2">
-            <a:schemeClr val="accent1"/>
-          </a:effectRef>
-          <a:fontRef idx="minor">
-            <a:schemeClr val="lt1"/>
-          </a:fontRef>
-        </p:style>
-        <p:txBody>
-          <a:bodyPr rtlCol="0" anchor="ctr"/>
-          <a:lstStyle/>
-          <a:p>
-            <a:pPr algn="ctr"/>
-          </a:p>
-        </p:txBody>
-      </p:sp>
+            <a:ext cx="12191695" cy="6858000"/>
+          </a:xfrm>
+          <a:prstGeom prst="rect">
+            <a:avLst/>
+          </a:prstGeom>
+        </p:spPr>
+      </p:pic>
       <p:sp>
         <p:nvSpPr>
           <p:cNvPr id="3" name="TextBox 2"/>
@@ -12403,7 +11897,7 @@
               </a:defRPr>
             </a:pPr>
             <a:r>
-              <a:t>Gruppe 4 · Enis · Paket C · 27.10.2026 | Quellen: MeteoSchweiz (2026), SBB/SKI (2026), swisstopo (2026)</a:t>
+              <a:t>Gruppe 4 · Enis · Paket C | Quellen: MeteoSchweiz (2026), SBB/SKI (2026), swisstopo (2026)</a:t>
             </a:r>
           </a:p>
         </p:txBody>
@@ -12675,846 +12169,6 @@
                 <a:hlinkClick r:id="rId5"/>
               </a:rPr>
               <a:t>https://www.statsmodels.org/stable/regression.html</a:t>
-            </a:r>
-          </a:p>
-        </p:txBody>
-      </p:sp>
-    </p:spTree>
-  </p:cSld>
-  <p:clrMapOvr>
-    <a:masterClrMapping/>
-  </p:clrMapOvr>
-</p:sld>
-</file>
-
-<file path=ppt/slides/slide21.xml><?xml version="1.0" encoding="utf-8"?>
-<p:sld xmlns:a="http://schemas.openxmlformats.org/drawingml/2006/main" xmlns:p="http://schemas.openxmlformats.org/presentationml/2006/main" xmlns:r="http://schemas.openxmlformats.org/officeDocument/2006/relationships">
-  <p:cSld>
-    <p:bg>
-      <p:bgPr>
-        <a:solidFill>
-          <a:srgbClr val="FFFFFF"/>
-        </a:solidFill>
-        <a:effectLst/>
-      </p:bgPr>
-    </p:bg>
-    <p:spTree>
-      <p:nvGrpSpPr>
-        <p:cNvPr id="1" name=""/>
-        <p:cNvGrpSpPr/>
-        <p:nvPr/>
-      </p:nvGrpSpPr>
-      <p:grpSpPr/>
-      <p:sp>
-        <p:nvSpPr>
-          <p:cNvPr id="2" name="Rectangle 1"/>
-          <p:cNvSpPr/>
-          <p:nvPr/>
-        </p:nvSpPr>
-        <p:spPr>
-          <a:xfrm>
-            <a:off x="0" y="0"/>
-            <a:ext cx="12191695" cy="109728"/>
-          </a:xfrm>
-          <a:prstGeom prst="rect">
-            <a:avLst/>
-          </a:prstGeom>
-          <a:solidFill>
-            <a:srgbClr val="167D8D"/>
-          </a:solidFill>
-          <a:ln>
-            <a:noFill/>
-          </a:ln>
-        </p:spPr>
-        <p:style>
-          <a:lnRef idx="1">
-            <a:schemeClr val="accent1"/>
-          </a:lnRef>
-          <a:fillRef idx="3">
-            <a:schemeClr val="accent1"/>
-          </a:fillRef>
-          <a:effectRef idx="2">
-            <a:schemeClr val="accent1"/>
-          </a:effectRef>
-          <a:fontRef idx="minor">
-            <a:schemeClr val="lt1"/>
-          </a:fontRef>
-        </p:style>
-        <p:txBody>
-          <a:bodyPr rtlCol="0" anchor="ctr"/>
-          <a:lstStyle/>
-          <a:p>
-            <a:pPr algn="ctr"/>
-          </a:p>
-        </p:txBody>
-      </p:sp>
-      <p:sp>
-        <p:nvSpPr>
-          <p:cNvPr id="3" name="TextBox 2"/>
-          <p:cNvSpPr txBox="1"/>
-          <p:nvPr/>
-        </p:nvSpPr>
-        <p:spPr>
-          <a:xfrm>
-            <a:off x="457200" y="320040"/>
-            <a:ext cx="11247120" cy="548640"/>
-          </a:xfrm>
-          <a:prstGeom prst="rect">
-            <a:avLst/>
-          </a:prstGeom>
-          <a:noFill/>
-        </p:spPr>
-        <p:txBody>
-          <a:bodyPr wrap="square">
-            <a:spAutoFit/>
-          </a:bodyPr>
-          <a:lstStyle/>
-          <a:p>
-            <a:pPr>
-              <a:spcAft>
-                <a:spcPts val="1200"/>
-              </a:spcAft>
-              <a:defRPr sz="3000" b="1">
-                <a:solidFill>
-                  <a:srgbClr val="17364A"/>
-                </a:solidFill>
-                <a:latin typeface="Aptos"/>
-              </a:defRPr>
-            </a:pPr>
-            <a:r>
-              <a:t>Paket B: mögliche Fragen 1/2 (Anhang)</a:t>
-            </a:r>
-          </a:p>
-        </p:txBody>
-      </p:sp>
-      <p:sp>
-        <p:nvSpPr>
-          <p:cNvPr id="4" name="TextBox 3"/>
-          <p:cNvSpPr txBox="1"/>
-          <p:nvPr/>
-        </p:nvSpPr>
-        <p:spPr>
-          <a:xfrm>
-            <a:off x="457200" y="6473952"/>
-            <a:ext cx="10881360" cy="274320"/>
-          </a:xfrm>
-          <a:prstGeom prst="rect">
-            <a:avLst/>
-          </a:prstGeom>
-          <a:noFill/>
-        </p:spPr>
-        <p:txBody>
-          <a:bodyPr wrap="square">
-            <a:spAutoFit/>
-          </a:bodyPr>
-          <a:lstStyle/>
-          <a:p>
-            <a:pPr>
-              <a:spcAft>
-                <a:spcPts val="1200"/>
-              </a:spcAft>
-              <a:defRPr sz="1000" b="0">
-                <a:solidFill>
-                  <a:srgbClr val="53616B"/>
-                </a:solidFill>
-                <a:latin typeface="Aptos"/>
-              </a:defRPr>
-            </a:pPr>
-            <a:r>
-              <a:t>Gruppe 4 · Aladin · Paket B · 27.10.2026 | Quellen: SBB/SKI (2026), swisstopo (2026), DuckDB Foundation (2026)</a:t>
-            </a:r>
-          </a:p>
-        </p:txBody>
-      </p:sp>
-      <p:sp>
-        <p:nvSpPr>
-          <p:cNvPr id="5" name="TextBox 4"/>
-          <p:cNvSpPr txBox="1"/>
-          <p:nvPr/>
-        </p:nvSpPr>
-        <p:spPr>
-          <a:xfrm>
-            <a:off x="11338560" y="6455664"/>
-            <a:ext cx="457200" cy="274320"/>
-          </a:xfrm>
-          <a:prstGeom prst="rect">
-            <a:avLst/>
-          </a:prstGeom>
-          <a:noFill/>
-        </p:spPr>
-        <p:txBody>
-          <a:bodyPr wrap="square">
-            <a:spAutoFit/>
-          </a:bodyPr>
-          <a:lstStyle/>
-          <a:p>
-            <a:pPr>
-              <a:spcAft>
-                <a:spcPts val="1200"/>
-              </a:spcAft>
-              <a:defRPr sz="1100" b="0">
-                <a:solidFill>
-                  <a:srgbClr val="53616B"/>
-                </a:solidFill>
-                <a:latin typeface="Aptos"/>
-              </a:defRPr>
-            </a:pPr>
-            <a:r>
-              <a:t>21</a:t>
-            </a:r>
-          </a:p>
-        </p:txBody>
-      </p:sp>
-      <p:sp>
-        <p:nvSpPr>
-          <p:cNvPr id="6" name="TextBox 5"/>
-          <p:cNvSpPr txBox="1"/>
-          <p:nvPr/>
-        </p:nvSpPr>
-        <p:spPr>
-          <a:xfrm>
-            <a:off x="502920" y="1234440"/>
-            <a:ext cx="11155680" cy="457200"/>
-          </a:xfrm>
-          <a:prstGeom prst="rect">
-            <a:avLst/>
-          </a:prstGeom>
-          <a:noFill/>
-        </p:spPr>
-        <p:txBody>
-          <a:bodyPr wrap="square">
-            <a:spAutoFit/>
-          </a:bodyPr>
-          <a:lstStyle/>
-          <a:p>
-            <a:pPr>
-              <a:spcAft>
-                <a:spcPts val="1200"/>
-              </a:spcAft>
-              <a:defRPr sz="2000" b="1">
-                <a:solidFill>
-                  <a:srgbClr val="167D8D"/>
-                </a:solidFill>
-                <a:latin typeface="Aptos"/>
-              </a:defRPr>
-            </a:pPr>
-            <a:r>
-              <a:t>Warum nicht PostgreSQL?</a:t>
-            </a:r>
-          </a:p>
-        </p:txBody>
-      </p:sp>
-      <p:sp>
-        <p:nvSpPr>
-          <p:cNvPr id="7" name="TextBox 6"/>
-          <p:cNvSpPr txBox="1"/>
-          <p:nvPr/>
-        </p:nvSpPr>
-        <p:spPr>
-          <a:xfrm>
-            <a:off x="502920" y="1737360"/>
-            <a:ext cx="11155680" cy="1097280"/>
-          </a:xfrm>
-          <a:prstGeom prst="rect">
-            <a:avLst/>
-          </a:prstGeom>
-          <a:noFill/>
-        </p:spPr>
-        <p:txBody>
-          <a:bodyPr wrap="square">
-            <a:spAutoFit/>
-          </a:bodyPr>
-          <a:lstStyle/>
-          <a:p>
-            <a:pPr>
-              <a:spcAft>
-                <a:spcPts val="1200"/>
-              </a:spcAft>
-              <a:defRPr sz="1700" b="0">
-                <a:solidFill>
-                  <a:srgbClr val="17364A"/>
-                </a:solidFill>
-                <a:latin typeface="Aptos"/>
-              </a:defRPr>
-            </a:pPr>
-            <a:r>
-              <a:t>Für Teil 1 brauchen wir Analyse, keinen Mehrbenutzerbetrieb. DuckDB ist schneller aufgesetzt und spaltenorientiert; das Schema ist Standard-SQL, ein Wechsel ist einfach.</a:t>
-            </a:r>
-          </a:p>
-        </p:txBody>
-      </p:sp>
-      <p:sp>
-        <p:nvSpPr>
-          <p:cNvPr id="8" name="TextBox 7"/>
-          <p:cNvSpPr txBox="1"/>
-          <p:nvPr/>
-        </p:nvSpPr>
-        <p:spPr>
-          <a:xfrm>
-            <a:off x="502920" y="2926080"/>
-            <a:ext cx="11155680" cy="457200"/>
-          </a:xfrm>
-          <a:prstGeom prst="rect">
-            <a:avLst/>
-          </a:prstGeom>
-          <a:noFill/>
-        </p:spPr>
-        <p:txBody>
-          <a:bodyPr wrap="square">
-            <a:spAutoFit/>
-          </a:bodyPr>
-          <a:lstStyle/>
-          <a:p>
-            <a:pPr>
-              <a:spcAft>
-                <a:spcPts val="1200"/>
-              </a:spcAft>
-              <a:defRPr sz="2000" b="1">
-                <a:solidFill>
-                  <a:srgbClr val="167D8D"/>
-                </a:solidFill>
-                <a:latin typeface="Aptos"/>
-              </a:defRPr>
-            </a:pPr>
-            <a:r>
-              <a:t>Was heisst idempotent bei euch?</a:t>
-            </a:r>
-          </a:p>
-        </p:txBody>
-      </p:sp>
-      <p:sp>
-        <p:nvSpPr>
-          <p:cNvPr id="9" name="TextBox 8"/>
-          <p:cNvSpPr txBox="1"/>
-          <p:nvPr/>
-        </p:nvSpPr>
-        <p:spPr>
-          <a:xfrm>
-            <a:off x="502920" y="3429000"/>
-            <a:ext cx="11155680" cy="1097280"/>
-          </a:xfrm>
-          <a:prstGeom prst="rect">
-            <a:avLst/>
-          </a:prstGeom>
-          <a:noFill/>
-        </p:spPr>
-        <p:txBody>
-          <a:bodyPr wrap="square">
-            <a:spAutoFit/>
-          </a:bodyPr>
-          <a:lstStyle/>
-          <a:p>
-            <a:pPr>
-              <a:spcAft>
-                <a:spcPts val="1200"/>
-              </a:spcAft>
-              <a:defRPr sz="1700" b="0">
-                <a:solidFill>
-                  <a:srgbClr val="17364A"/>
-                </a:solidFill>
-                <a:latin typeface="Aptos"/>
-              </a:defRPr>
-            </a:pPr>
-            <a:r>
-              <a:t>Jeder Tag wird in einer Transaktion gelöscht und neu eingefügt. Ein zweiter Lauf überspringt fertige Tage. Geprüft: zweiter Lauf, 90 Tage übersprungen.</a:t>
-            </a:r>
-          </a:p>
-        </p:txBody>
-      </p:sp>
-      <p:sp>
-        <p:nvSpPr>
-          <p:cNvPr id="10" name="TextBox 9"/>
-          <p:cNvSpPr txBox="1"/>
-          <p:nvPr/>
-        </p:nvSpPr>
-        <p:spPr>
-          <a:xfrm>
-            <a:off x="502920" y="4617720"/>
-            <a:ext cx="11155680" cy="457200"/>
-          </a:xfrm>
-          <a:prstGeom prst="rect">
-            <a:avLst/>
-          </a:prstGeom>
-          <a:noFill/>
-        </p:spPr>
-        <p:txBody>
-          <a:bodyPr wrap="square">
-            <a:spAutoFit/>
-          </a:bodyPr>
-          <a:lstStyle/>
-          <a:p>
-            <a:pPr>
-              <a:spcAft>
-                <a:spcPts val="1200"/>
-              </a:spcAft>
-              <a:defRPr sz="2000" b="1">
-                <a:solidFill>
-                  <a:srgbClr val="167D8D"/>
-                </a:solidFill>
-                <a:latin typeface="Aptos"/>
-              </a:defRPr>
-            </a:pPr>
-            <a:r>
-              <a:t>Wie geht ihr mit der Sommerzeit um?</a:t>
-            </a:r>
-          </a:p>
-        </p:txBody>
-      </p:sp>
-      <p:sp>
-        <p:nvSpPr>
-          <p:cNvPr id="11" name="TextBox 10"/>
-          <p:cNvSpPr txBox="1"/>
-          <p:nvPr/>
-        </p:nvSpPr>
-        <p:spPr>
-          <a:xfrm>
-            <a:off x="502920" y="5120640"/>
-            <a:ext cx="11155680" cy="1097280"/>
-          </a:xfrm>
-          <a:prstGeom prst="rect">
-            <a:avLst/>
-          </a:prstGeom>
-          <a:noFill/>
-        </p:spPr>
-        <p:txBody>
-          <a:bodyPr wrap="square">
-            <a:spAutoFit/>
-          </a:bodyPr>
-          <a:lstStyle/>
-          <a:p>
-            <a:pPr>
-              <a:spcAft>
-                <a:spcPts val="1200"/>
-              </a:spcAft>
-              <a:defRPr sz="1700" b="0">
-                <a:solidFill>
-                  <a:srgbClr val="17364A"/>
-                </a:solidFill>
-                <a:latin typeface="Aptos"/>
-              </a:defRPr>
-            </a:pPr>
-            <a:r>
-              <a:t>Rohzeiten sind Lokalzeit. Wir wandeln sie mit Europe/Zurich in TIMESTAMPTZ um, so stimmen Dauern über die Umstellung am 29.3.</a:t>
-            </a:r>
-          </a:p>
-        </p:txBody>
-      </p:sp>
-    </p:spTree>
-  </p:cSld>
-  <p:clrMapOvr>
-    <a:masterClrMapping/>
-  </p:clrMapOvr>
-</p:sld>
-</file>
-
-<file path=ppt/slides/slide22.xml><?xml version="1.0" encoding="utf-8"?>
-<p:sld xmlns:a="http://schemas.openxmlformats.org/drawingml/2006/main" xmlns:p="http://schemas.openxmlformats.org/presentationml/2006/main" xmlns:r="http://schemas.openxmlformats.org/officeDocument/2006/relationships">
-  <p:cSld>
-    <p:bg>
-      <p:bgPr>
-        <a:solidFill>
-          <a:srgbClr val="FFFFFF"/>
-        </a:solidFill>
-        <a:effectLst/>
-      </p:bgPr>
-    </p:bg>
-    <p:spTree>
-      <p:nvGrpSpPr>
-        <p:cNvPr id="1" name=""/>
-        <p:cNvGrpSpPr/>
-        <p:nvPr/>
-      </p:nvGrpSpPr>
-      <p:grpSpPr/>
-      <p:sp>
-        <p:nvSpPr>
-          <p:cNvPr id="2" name="Rectangle 1"/>
-          <p:cNvSpPr/>
-          <p:nvPr/>
-        </p:nvSpPr>
-        <p:spPr>
-          <a:xfrm>
-            <a:off x="0" y="0"/>
-            <a:ext cx="12191695" cy="109728"/>
-          </a:xfrm>
-          <a:prstGeom prst="rect">
-            <a:avLst/>
-          </a:prstGeom>
-          <a:solidFill>
-            <a:srgbClr val="167D8D"/>
-          </a:solidFill>
-          <a:ln>
-            <a:noFill/>
-          </a:ln>
-        </p:spPr>
-        <p:style>
-          <a:lnRef idx="1">
-            <a:schemeClr val="accent1"/>
-          </a:lnRef>
-          <a:fillRef idx="3">
-            <a:schemeClr val="accent1"/>
-          </a:fillRef>
-          <a:effectRef idx="2">
-            <a:schemeClr val="accent1"/>
-          </a:effectRef>
-          <a:fontRef idx="minor">
-            <a:schemeClr val="lt1"/>
-          </a:fontRef>
-        </p:style>
-        <p:txBody>
-          <a:bodyPr rtlCol="0" anchor="ctr"/>
-          <a:lstStyle/>
-          <a:p>
-            <a:pPr algn="ctr"/>
-          </a:p>
-        </p:txBody>
-      </p:sp>
-      <p:sp>
-        <p:nvSpPr>
-          <p:cNvPr id="3" name="TextBox 2"/>
-          <p:cNvSpPr txBox="1"/>
-          <p:nvPr/>
-        </p:nvSpPr>
-        <p:spPr>
-          <a:xfrm>
-            <a:off x="457200" y="320040"/>
-            <a:ext cx="11247120" cy="548640"/>
-          </a:xfrm>
-          <a:prstGeom prst="rect">
-            <a:avLst/>
-          </a:prstGeom>
-          <a:noFill/>
-        </p:spPr>
-        <p:txBody>
-          <a:bodyPr wrap="square">
-            <a:spAutoFit/>
-          </a:bodyPr>
-          <a:lstStyle/>
-          <a:p>
-            <a:pPr>
-              <a:spcAft>
-                <a:spcPts val="1200"/>
-              </a:spcAft>
-              <a:defRPr sz="3000" b="1">
-                <a:solidFill>
-                  <a:srgbClr val="17364A"/>
-                </a:solidFill>
-                <a:latin typeface="Aptos"/>
-              </a:defRPr>
-            </a:pPr>
-            <a:r>
-              <a:t>Paket B: mögliche Fragen 2/2 (Anhang)</a:t>
-            </a:r>
-          </a:p>
-        </p:txBody>
-      </p:sp>
-      <p:sp>
-        <p:nvSpPr>
-          <p:cNvPr id="4" name="TextBox 3"/>
-          <p:cNvSpPr txBox="1"/>
-          <p:nvPr/>
-        </p:nvSpPr>
-        <p:spPr>
-          <a:xfrm>
-            <a:off x="457200" y="6473952"/>
-            <a:ext cx="10881360" cy="274320"/>
-          </a:xfrm>
-          <a:prstGeom prst="rect">
-            <a:avLst/>
-          </a:prstGeom>
-          <a:noFill/>
-        </p:spPr>
-        <p:txBody>
-          <a:bodyPr wrap="square">
-            <a:spAutoFit/>
-          </a:bodyPr>
-          <a:lstStyle/>
-          <a:p>
-            <a:pPr>
-              <a:spcAft>
-                <a:spcPts val="1200"/>
-              </a:spcAft>
-              <a:defRPr sz="1000" b="0">
-                <a:solidFill>
-                  <a:srgbClr val="53616B"/>
-                </a:solidFill>
-                <a:latin typeface="Aptos"/>
-              </a:defRPr>
-            </a:pPr>
-            <a:r>
-              <a:t>Gruppe 4 · Aladin · Paket B · 27.10.2026 | Quellen: SBB/SKI (2026), swisstopo (2026), DuckDB Foundation (2026)</a:t>
-            </a:r>
-          </a:p>
-        </p:txBody>
-      </p:sp>
-      <p:sp>
-        <p:nvSpPr>
-          <p:cNvPr id="5" name="TextBox 4"/>
-          <p:cNvSpPr txBox="1"/>
-          <p:nvPr/>
-        </p:nvSpPr>
-        <p:spPr>
-          <a:xfrm>
-            <a:off x="11338560" y="6455664"/>
-            <a:ext cx="457200" cy="274320"/>
-          </a:xfrm>
-          <a:prstGeom prst="rect">
-            <a:avLst/>
-          </a:prstGeom>
-          <a:noFill/>
-        </p:spPr>
-        <p:txBody>
-          <a:bodyPr wrap="square">
-            <a:spAutoFit/>
-          </a:bodyPr>
-          <a:lstStyle/>
-          <a:p>
-            <a:pPr>
-              <a:spcAft>
-                <a:spcPts val="1200"/>
-              </a:spcAft>
-              <a:defRPr sz="1100" b="0">
-                <a:solidFill>
-                  <a:srgbClr val="53616B"/>
-                </a:solidFill>
-                <a:latin typeface="Aptos"/>
-              </a:defRPr>
-            </a:pPr>
-            <a:r>
-              <a:t>22</a:t>
-            </a:r>
-          </a:p>
-        </p:txBody>
-      </p:sp>
-      <p:sp>
-        <p:nvSpPr>
-          <p:cNvPr id="6" name="TextBox 5"/>
-          <p:cNvSpPr txBox="1"/>
-          <p:nvPr/>
-        </p:nvSpPr>
-        <p:spPr>
-          <a:xfrm>
-            <a:off x="502920" y="1234440"/>
-            <a:ext cx="11155680" cy="457200"/>
-          </a:xfrm>
-          <a:prstGeom prst="rect">
-            <a:avLst/>
-          </a:prstGeom>
-          <a:noFill/>
-        </p:spPr>
-        <p:txBody>
-          <a:bodyPr wrap="square">
-            <a:spAutoFit/>
-          </a:bodyPr>
-          <a:lstStyle/>
-          <a:p>
-            <a:pPr>
-              <a:spcAft>
-                <a:spcPts val="1200"/>
-              </a:spcAft>
-              <a:defRPr sz="2000" b="1">
-                <a:solidFill>
-                  <a:srgbClr val="167D8D"/>
-                </a:solidFill>
-                <a:latin typeface="Aptos"/>
-              </a:defRPr>
-            </a:pPr>
-            <a:r>
-              <a:t>Wie zuverlässig sind die Ist-Zeiten?</a:t>
-            </a:r>
-          </a:p>
-        </p:txBody>
-      </p:sp>
-      <p:sp>
-        <p:nvSpPr>
-          <p:cNvPr id="7" name="TextBox 6"/>
-          <p:cNvSpPr txBox="1"/>
-          <p:nvPr/>
-        </p:nvSpPr>
-        <p:spPr>
-          <a:xfrm>
-            <a:off x="502920" y="1737360"/>
-            <a:ext cx="11155680" cy="1097280"/>
-          </a:xfrm>
-          <a:prstGeom prst="rect">
-            <a:avLst/>
-          </a:prstGeom>
-          <a:noFill/>
-        </p:spPr>
-        <p:txBody>
-          <a:bodyPr wrap="square">
-            <a:spAutoFit/>
-          </a:bodyPr>
-          <a:lstStyle/>
-          <a:p>
-            <a:pPr>
-              <a:spcAft>
-                <a:spcPts val="1200"/>
-              </a:spcAft>
-              <a:defRPr sz="1700" b="0">
-                <a:solidFill>
-                  <a:srgbClr val="17364A"/>
-                </a:solidFill>
-                <a:latin typeface="Aptos"/>
-              </a:defRPr>
-            </a:pPr>
-            <a:r>
-              <a:t>Ankunft gemessen: Bahn 89,7 %, Bus 65,9 %. Der Rest sind Prognosen, Schätzungen oder Halte mit leerem oder unbekanntem Status (z. B. ohne Ankunft am Startort). Der Status ist pro Zeit gespeichert, Paket C nimmt nur gemessene Werte.</a:t>
-            </a:r>
-          </a:p>
-        </p:txBody>
-      </p:sp>
-      <p:sp>
-        <p:nvSpPr>
-          <p:cNvPr id="8" name="TextBox 7"/>
-          <p:cNvSpPr txBox="1"/>
-          <p:nvPr/>
-        </p:nvSpPr>
-        <p:spPr>
-          <a:xfrm>
-            <a:off x="502920" y="2926080"/>
-            <a:ext cx="11155680" cy="457200"/>
-          </a:xfrm>
-          <a:prstGeom prst="rect">
-            <a:avLst/>
-          </a:prstGeom>
-          <a:noFill/>
-        </p:spPr>
-        <p:txBody>
-          <a:bodyPr wrap="square">
-            <a:spAutoFit/>
-          </a:bodyPr>
-          <a:lstStyle/>
-          <a:p>
-            <a:pPr>
-              <a:spcAft>
-                <a:spcPts val="1200"/>
-              </a:spcAft>
-              <a:defRPr sz="2000" b="1">
-                <a:solidFill>
-                  <a:srgbClr val="167D8D"/>
-                </a:solidFill>
-                <a:latin typeface="Aptos"/>
-              </a:defRPr>
-            </a:pPr>
-            <a:r>
-              <a:t>Wie habt ihr die Haltestellen den Kantonen zugeordnet?</a:t>
-            </a:r>
-          </a:p>
-        </p:txBody>
-      </p:sp>
-      <p:sp>
-        <p:nvSpPr>
-          <p:cNvPr id="9" name="TextBox 8"/>
-          <p:cNvSpPr txBox="1"/>
-          <p:nvPr/>
-        </p:nvSpPr>
-        <p:spPr>
-          <a:xfrm>
-            <a:off x="502920" y="3429000"/>
-            <a:ext cx="11155680" cy="1097280"/>
-          </a:xfrm>
-          <a:prstGeom prst="rect">
-            <a:avLst/>
-          </a:prstGeom>
-          <a:noFill/>
-        </p:spPr>
-        <p:txBody>
-          <a:bodyPr wrap="square">
-            <a:spAutoFit/>
-          </a:bodyPr>
-          <a:lstStyle/>
-          <a:p>
-            <a:pPr>
-              <a:spcAft>
-                <a:spcPts val="1200"/>
-              </a:spcAft>
-              <a:defRPr sz="1700" b="0">
-                <a:solidFill>
-                  <a:srgbClr val="17364A"/>
-                </a:solidFill>
-                <a:latin typeface="Aptos"/>
-              </a:defRPr>
-            </a:pPr>
-            <a:r>
-              <a:t>Koordinaten aus dem GTFS-Fahrplan, dann Punkt-in-Polygon mit den Kantonsgrenzen von swisstopo. Ergebnis: 2587 Haltestellen.</a:t>
-            </a:r>
-          </a:p>
-        </p:txBody>
-      </p:sp>
-      <p:sp>
-        <p:nvSpPr>
-          <p:cNvPr id="10" name="TextBox 9"/>
-          <p:cNvSpPr txBox="1"/>
-          <p:nvPr/>
-        </p:nvSpPr>
-        <p:spPr>
-          <a:xfrm>
-            <a:off x="502920" y="4617720"/>
-            <a:ext cx="11155680" cy="457200"/>
-          </a:xfrm>
-          <a:prstGeom prst="rect">
-            <a:avLst/>
-          </a:prstGeom>
-          <a:noFill/>
-        </p:spPr>
-        <p:txBody>
-          <a:bodyPr wrap="square">
-            <a:spAutoFit/>
-          </a:bodyPr>
-          <a:lstStyle/>
-          <a:p>
-            <a:pPr>
-              <a:spcAft>
-                <a:spcPts val="1200"/>
-              </a:spcAft>
-              <a:defRPr sz="2000" b="1">
-                <a:solidFill>
-                  <a:srgbClr val="167D8D"/>
-                </a:solidFill>
-                <a:latin typeface="Aptos"/>
-              </a:defRPr>
-            </a:pPr>
-            <a:r>
-              <a:t>Warum liegen die Rohdaten nicht im Repo?</a:t>
-            </a:r>
-          </a:p>
-        </p:txBody>
-      </p:sp>
-      <p:sp>
-        <p:nvSpPr>
-          <p:cNvPr id="11" name="TextBox 10"/>
-          <p:cNvSpPr txBox="1"/>
-          <p:nvPr/>
-        </p:nvSpPr>
-        <p:spPr>
-          <a:xfrm>
-            <a:off x="502920" y="5120640"/>
-            <a:ext cx="11155680" cy="1097280"/>
-          </a:xfrm>
-          <a:prstGeom prst="rect">
-            <a:avLst/>
-          </a:prstGeom>
-          <a:noFill/>
-        </p:spPr>
-        <p:txBody>
-          <a:bodyPr wrap="square">
-            <a:spAutoFit/>
-          </a:bodyPr>
-          <a:lstStyle/>
-          <a:p>
-            <a:pPr>
-              <a:spcAft>
-                <a:spcPts val="1200"/>
-              </a:spcAft>
-              <a:defRPr sz="1700" b="0">
-                <a:solidFill>
-                  <a:srgbClr val="17364A"/>
-                </a:solidFill>
-                <a:latin typeface="Aptos"/>
-              </a:defRPr>
-            </a:pPr>
-            <a:r>
-              <a:t>Rund 50 GB ungefiltert. Im Repo liegt ein Beispieltag, das Skript lädt alles mit einem Befehl nach. Die gefilterten Daten liegen als Parquet auf OneDrive.</a:t>
             </a:r>
           </a:p>
         </p:txBody>
@@ -13545,49 +12199,30 @@
         <p:nvPr/>
       </p:nvGrpSpPr>
       <p:grpSpPr/>
-      <p:sp>
-        <p:nvSpPr>
-          <p:cNvPr id="2" name="Rectangle 1"/>
-          <p:cNvSpPr/>
-          <p:nvPr/>
-        </p:nvSpPr>
+      <p:pic>
+        <p:nvPicPr>
+          <p:cNvPr id="17" name="Picture 16" descr="hintergrund_inhalt.png"/>
+          <p:cNvPicPr>
+            <a:picLocks noChangeAspect="1"/>
+          </p:cNvPicPr>
+          <p:nvPr/>
+        </p:nvPicPr>
+        <p:blipFill>
+          <a:blip r:embed="rId3"/>
+          <a:stretch>
+            <a:fillRect/>
+          </a:stretch>
+        </p:blipFill>
         <p:spPr>
           <a:xfrm>
             <a:off x="0" y="0"/>
-            <a:ext cx="12191695" cy="109728"/>
-          </a:xfrm>
-          <a:prstGeom prst="rect">
-            <a:avLst/>
-          </a:prstGeom>
-          <a:solidFill>
-            <a:srgbClr val="167D8D"/>
-          </a:solidFill>
-          <a:ln>
-            <a:noFill/>
-          </a:ln>
-        </p:spPr>
-        <p:style>
-          <a:lnRef idx="1">
-            <a:schemeClr val="accent1"/>
-          </a:lnRef>
-          <a:fillRef idx="3">
-            <a:schemeClr val="accent1"/>
-          </a:fillRef>
-          <a:effectRef idx="2">
-            <a:schemeClr val="accent1"/>
-          </a:effectRef>
-          <a:fontRef idx="minor">
-            <a:schemeClr val="lt1"/>
-          </a:fontRef>
-        </p:style>
-        <p:txBody>
-          <a:bodyPr rtlCol="0" anchor="ctr"/>
-          <a:lstStyle/>
-          <a:p>
-            <a:pPr algn="ctr"/>
-          </a:p>
-        </p:txBody>
-      </p:sp>
+            <a:ext cx="12191695" cy="6858000"/>
+          </a:xfrm>
+          <a:prstGeom prst="rect">
+            <a:avLst/>
+          </a:prstGeom>
+        </p:spPr>
+      </p:pic>
       <p:sp>
         <p:nvSpPr>
           <p:cNvPr id="3" name="TextBox 2"/>
@@ -13661,7 +12296,7 @@
               </a:defRPr>
             </a:pPr>
             <a:r>
-              <a:t>Gruppe 4 · Timon · Paket A · 27.10.2026 | Quellen: SBB AG (o. J.), Reis &amp; Housley (2022), DuckDB Foundation (2026)</a:t>
+              <a:t>Gruppe 4 · Timon · Paket A | Quellen: SBB AG (o. J.), Reis &amp; Housley (2022), DuckDB Foundation (2026)</a:t>
             </a:r>
           </a:p>
         </p:txBody>
@@ -14203,49 +12838,30 @@
         <p:nvPr/>
       </p:nvGrpSpPr>
       <p:grpSpPr/>
-      <p:sp>
-        <p:nvSpPr>
-          <p:cNvPr id="2" name="Rectangle 1"/>
-          <p:cNvSpPr/>
-          <p:nvPr/>
-        </p:nvSpPr>
+      <p:pic>
+        <p:nvPicPr>
+          <p:cNvPr id="17" name="Picture 16" descr="hintergrund_inhalt.png"/>
+          <p:cNvPicPr>
+            <a:picLocks noChangeAspect="1"/>
+          </p:cNvPicPr>
+          <p:nvPr/>
+        </p:nvPicPr>
+        <p:blipFill>
+          <a:blip r:embed="rId3"/>
+          <a:stretch>
+            <a:fillRect/>
+          </a:stretch>
+        </p:blipFill>
         <p:spPr>
           <a:xfrm>
             <a:off x="0" y="0"/>
-            <a:ext cx="12191695" cy="109728"/>
-          </a:xfrm>
-          <a:prstGeom prst="rect">
-            <a:avLst/>
-          </a:prstGeom>
-          <a:solidFill>
-            <a:srgbClr val="167D8D"/>
-          </a:solidFill>
-          <a:ln>
-            <a:noFill/>
-          </a:ln>
-        </p:spPr>
-        <p:style>
-          <a:lnRef idx="1">
-            <a:schemeClr val="accent1"/>
-          </a:lnRef>
-          <a:fillRef idx="3">
-            <a:schemeClr val="accent1"/>
-          </a:fillRef>
-          <a:effectRef idx="2">
-            <a:schemeClr val="accent1"/>
-          </a:effectRef>
-          <a:fontRef idx="minor">
-            <a:schemeClr val="lt1"/>
-          </a:fontRef>
-        </p:style>
-        <p:txBody>
-          <a:bodyPr rtlCol="0" anchor="ctr"/>
-          <a:lstStyle/>
-          <a:p>
-            <a:pPr algn="ctr"/>
-          </a:p>
-        </p:txBody>
-      </p:sp>
+            <a:ext cx="12191695" cy="6858000"/>
+          </a:xfrm>
+          <a:prstGeom prst="rect">
+            <a:avLst/>
+          </a:prstGeom>
+        </p:spPr>
+      </p:pic>
       <p:sp>
         <p:nvSpPr>
           <p:cNvPr id="3" name="TextBox 2"/>
@@ -14319,7 +12935,7 @@
               </a:defRPr>
             </a:pPr>
             <a:r>
-              <a:t>Gruppe 4 · Timon · Paket A · 27.10.2026 | Quellen: SBB AG (o. J.), Reis &amp; Housley (2022), DuckDB Foundation (2026)</a:t>
+              <a:t>Gruppe 4 · Timon · Paket A | Quellen: SBB AG (o. J.), Reis &amp; Housley (2022), DuckDB Foundation (2026)</a:t>
             </a:r>
           </a:p>
         </p:txBody>
@@ -14839,49 +13455,30 @@
         <p:nvPr/>
       </p:nvGrpSpPr>
       <p:grpSpPr/>
-      <p:sp>
-        <p:nvSpPr>
-          <p:cNvPr id="2" name="Rectangle 1"/>
-          <p:cNvSpPr/>
-          <p:nvPr/>
-        </p:nvSpPr>
+      <p:pic>
+        <p:nvPicPr>
+          <p:cNvPr id="17" name="Picture 16" descr="hintergrund_inhalt.png"/>
+          <p:cNvPicPr>
+            <a:picLocks noChangeAspect="1"/>
+          </p:cNvPicPr>
+          <p:nvPr/>
+        </p:nvPicPr>
+        <p:blipFill>
+          <a:blip r:embed="rId3"/>
+          <a:stretch>
+            <a:fillRect/>
+          </a:stretch>
+        </p:blipFill>
         <p:spPr>
           <a:xfrm>
             <a:off x="0" y="0"/>
-            <a:ext cx="12191695" cy="109728"/>
-          </a:xfrm>
-          <a:prstGeom prst="rect">
-            <a:avLst/>
-          </a:prstGeom>
-          <a:solidFill>
-            <a:srgbClr val="167D8D"/>
-          </a:solidFill>
-          <a:ln>
-            <a:noFill/>
-          </a:ln>
-        </p:spPr>
-        <p:style>
-          <a:lnRef idx="1">
-            <a:schemeClr val="accent1"/>
-          </a:lnRef>
-          <a:fillRef idx="3">
-            <a:schemeClr val="accent1"/>
-          </a:fillRef>
-          <a:effectRef idx="2">
-            <a:schemeClr val="accent1"/>
-          </a:effectRef>
-          <a:fontRef idx="minor">
-            <a:schemeClr val="lt1"/>
-          </a:fontRef>
-        </p:style>
-        <p:txBody>
-          <a:bodyPr rtlCol="0" anchor="ctr"/>
-          <a:lstStyle/>
-          <a:p>
-            <a:pPr algn="ctr"/>
-          </a:p>
-        </p:txBody>
-      </p:sp>
+            <a:ext cx="12191695" cy="6858000"/>
+          </a:xfrm>
+          <a:prstGeom prst="rect">
+            <a:avLst/>
+          </a:prstGeom>
+        </p:spPr>
+      </p:pic>
       <p:sp>
         <p:nvSpPr>
           <p:cNvPr id="3" name="TextBox 2"/>
@@ -14955,7 +13552,7 @@
               </a:defRPr>
             </a:pPr>
             <a:r>
-              <a:t>Gruppe 4 · Timon · Paket A · 27.10.2026 | Quellen: SBB AG (o. J.), Reis &amp; Housley (2022), DuckDB Foundation (2026)</a:t>
+              <a:t>Gruppe 4 · Timon · Paket A | Quellen: SBB AG (o. J.), Reis &amp; Housley (2022), DuckDB Foundation (2026)</a:t>
             </a:r>
           </a:p>
         </p:txBody>
@@ -15470,49 +14067,30 @@
         <p:nvPr/>
       </p:nvGrpSpPr>
       <p:grpSpPr/>
-      <p:sp>
-        <p:nvSpPr>
-          <p:cNvPr id="2" name="Rectangle 1"/>
-          <p:cNvSpPr/>
-          <p:nvPr/>
-        </p:nvSpPr>
+      <p:pic>
+        <p:nvPicPr>
+          <p:cNvPr id="29" name="Picture 28" descr="hintergrund_inhalt.png"/>
+          <p:cNvPicPr>
+            <a:picLocks noChangeAspect="1"/>
+          </p:cNvPicPr>
+          <p:nvPr/>
+        </p:nvPicPr>
+        <p:blipFill>
+          <a:blip r:embed="rId3"/>
+          <a:stretch>
+            <a:fillRect/>
+          </a:stretch>
+        </p:blipFill>
         <p:spPr>
           <a:xfrm>
             <a:off x="0" y="0"/>
-            <a:ext cx="12191695" cy="109728"/>
-          </a:xfrm>
-          <a:prstGeom prst="rect">
-            <a:avLst/>
-          </a:prstGeom>
-          <a:solidFill>
-            <a:srgbClr val="167D8D"/>
-          </a:solidFill>
-          <a:ln>
-            <a:noFill/>
-          </a:ln>
-        </p:spPr>
-        <p:style>
-          <a:lnRef idx="1">
-            <a:schemeClr val="accent1"/>
-          </a:lnRef>
-          <a:fillRef idx="3">
-            <a:schemeClr val="accent1"/>
-          </a:fillRef>
-          <a:effectRef idx="2">
-            <a:schemeClr val="accent1"/>
-          </a:effectRef>
-          <a:fontRef idx="minor">
-            <a:schemeClr val="lt1"/>
-          </a:fontRef>
-        </p:style>
-        <p:txBody>
-          <a:bodyPr rtlCol="0" anchor="ctr"/>
-          <a:lstStyle/>
-          <a:p>
-            <a:pPr algn="ctr"/>
-          </a:p>
-        </p:txBody>
-      </p:sp>
+            <a:ext cx="12191695" cy="6858000"/>
+          </a:xfrm>
+          <a:prstGeom prst="rect">
+            <a:avLst/>
+          </a:prstGeom>
+        </p:spPr>
+      </p:pic>
       <p:sp>
         <p:nvSpPr>
           <p:cNvPr id="3" name="TextBox 2"/>
@@ -15586,7 +14164,7 @@
               </a:defRPr>
             </a:pPr>
             <a:r>
-              <a:t>Gruppe 4 · Timon · Paket A · 27.10.2026 | Quellen: SBB AG (o. J.), Reis &amp; Housley (2022), DuckDB Foundation (2026)</a:t>
+              <a:t>Gruppe 4 · Timon · Paket A | Quellen: SBB AG (o. J.), Reis &amp; Housley (2022), DuckDB Foundation (2026)</a:t>
             </a:r>
           </a:p>
         </p:txBody>
@@ -16765,49 +15343,30 @@
         <p:nvPr/>
       </p:nvGrpSpPr>
       <p:grpSpPr/>
-      <p:sp>
-        <p:nvSpPr>
-          <p:cNvPr id="2" name="Rectangle 1"/>
-          <p:cNvSpPr/>
-          <p:nvPr/>
-        </p:nvSpPr>
+      <p:pic>
+        <p:nvPicPr>
+          <p:cNvPr id="8" name="Picture 7" descr="hintergrund_inhalt.png"/>
+          <p:cNvPicPr>
+            <a:picLocks noChangeAspect="1"/>
+          </p:cNvPicPr>
+          <p:nvPr/>
+        </p:nvPicPr>
+        <p:blipFill>
+          <a:blip r:embed="rId3"/>
+          <a:stretch>
+            <a:fillRect/>
+          </a:stretch>
+        </p:blipFill>
         <p:spPr>
           <a:xfrm>
             <a:off x="0" y="0"/>
-            <a:ext cx="12191695" cy="109728"/>
-          </a:xfrm>
-          <a:prstGeom prst="rect">
-            <a:avLst/>
-          </a:prstGeom>
-          <a:solidFill>
-            <a:srgbClr val="167D8D"/>
-          </a:solidFill>
-          <a:ln>
-            <a:noFill/>
-          </a:ln>
-        </p:spPr>
-        <p:style>
-          <a:lnRef idx="1">
-            <a:schemeClr val="accent1"/>
-          </a:lnRef>
-          <a:fillRef idx="3">
-            <a:schemeClr val="accent1"/>
-          </a:fillRef>
-          <a:effectRef idx="2">
-            <a:schemeClr val="accent1"/>
-          </a:effectRef>
-          <a:fontRef idx="minor">
-            <a:schemeClr val="lt1"/>
-          </a:fontRef>
-        </p:style>
-        <p:txBody>
-          <a:bodyPr rtlCol="0" anchor="ctr"/>
-          <a:lstStyle/>
-          <a:p>
-            <a:pPr algn="ctr"/>
-          </a:p>
-        </p:txBody>
-      </p:sp>
+            <a:ext cx="12191695" cy="6858000"/>
+          </a:xfrm>
+          <a:prstGeom prst="rect">
+            <a:avLst/>
+          </a:prstGeom>
+        </p:spPr>
+      </p:pic>
       <p:sp>
         <p:nvSpPr>
           <p:cNvPr id="3" name="TextBox 2"/>
@@ -16881,7 +15440,7 @@
               </a:defRPr>
             </a:pPr>
             <a:r>
-              <a:t>Gruppe 4 · Aladin · Paket B · 27.10.2026 | Quellen: SBB/SKI (2026), swisstopo (2026), DuckDB Foundation (2026)</a:t>
+              <a:t>Gruppe 4 · Aladin · Paket B | Quellen: SBB/SKI (2026), swisstopo (2026), DuckDB Foundation (2026)</a:t>
             </a:r>
           </a:p>
         </p:txBody>
@@ -17366,49 +15925,30 @@
         <p:nvPr/>
       </p:nvGrpSpPr>
       <p:grpSpPr/>
-      <p:sp>
-        <p:nvSpPr>
-          <p:cNvPr id="2" name="Rectangle 1"/>
-          <p:cNvSpPr/>
-          <p:nvPr/>
-        </p:nvSpPr>
+      <p:pic>
+        <p:nvPicPr>
+          <p:cNvPr id="32" name="Picture 31" descr="hintergrund_inhalt.png"/>
+          <p:cNvPicPr>
+            <a:picLocks noChangeAspect="1"/>
+          </p:cNvPicPr>
+          <p:nvPr/>
+        </p:nvPicPr>
+        <p:blipFill>
+          <a:blip r:embed="rId3"/>
+          <a:stretch>
+            <a:fillRect/>
+          </a:stretch>
+        </p:blipFill>
         <p:spPr>
           <a:xfrm>
             <a:off x="0" y="0"/>
-            <a:ext cx="12191695" cy="109728"/>
-          </a:xfrm>
-          <a:prstGeom prst="rect">
-            <a:avLst/>
-          </a:prstGeom>
-          <a:solidFill>
-            <a:srgbClr val="167D8D"/>
-          </a:solidFill>
-          <a:ln>
-            <a:noFill/>
-          </a:ln>
-        </p:spPr>
-        <p:style>
-          <a:lnRef idx="1">
-            <a:schemeClr val="accent1"/>
-          </a:lnRef>
-          <a:fillRef idx="3">
-            <a:schemeClr val="accent1"/>
-          </a:fillRef>
-          <a:effectRef idx="2">
-            <a:schemeClr val="accent1"/>
-          </a:effectRef>
-          <a:fontRef idx="minor">
-            <a:schemeClr val="lt1"/>
-          </a:fontRef>
-        </p:style>
-        <p:txBody>
-          <a:bodyPr rtlCol="0" anchor="ctr"/>
-          <a:lstStyle/>
-          <a:p>
-            <a:pPr algn="ctr"/>
-          </a:p>
-        </p:txBody>
-      </p:sp>
+            <a:ext cx="12191695" cy="6858000"/>
+          </a:xfrm>
+          <a:prstGeom prst="rect">
+            <a:avLst/>
+          </a:prstGeom>
+        </p:spPr>
+      </p:pic>
       <p:sp>
         <p:nvSpPr>
           <p:cNvPr id="3" name="TextBox 2"/>
@@ -17482,7 +16022,7 @@
               </a:defRPr>
             </a:pPr>
             <a:r>
-              <a:t>Gruppe 4 · Aladin · Paket B · 27.10.2026 | Quellen: SBB/SKI (2026), swisstopo (2026), DuckDB Foundation (2026)</a:t>
+              <a:t>Gruppe 4 · Aladin · Paket B | Quellen: SBB/SKI (2026), swisstopo (2026), DuckDB Foundation (2026)</a:t>
             </a:r>
           </a:p>
         </p:txBody>
@@ -18597,49 +17137,30 @@
         <p:nvPr/>
       </p:nvGrpSpPr>
       <p:grpSpPr/>
-      <p:sp>
-        <p:nvSpPr>
-          <p:cNvPr id="2" name="Rectangle 1"/>
-          <p:cNvSpPr/>
-          <p:nvPr/>
-        </p:nvSpPr>
+      <p:pic>
+        <p:nvPicPr>
+          <p:cNvPr id="19" name="Picture 18" descr="hintergrund_inhalt.png"/>
+          <p:cNvPicPr>
+            <a:picLocks noChangeAspect="1"/>
+          </p:cNvPicPr>
+          <p:nvPr/>
+        </p:nvPicPr>
+        <p:blipFill>
+          <a:blip r:embed="rId3"/>
+          <a:stretch>
+            <a:fillRect/>
+          </a:stretch>
+        </p:blipFill>
         <p:spPr>
           <a:xfrm>
             <a:off x="0" y="0"/>
-            <a:ext cx="12191695" cy="109728"/>
-          </a:xfrm>
-          <a:prstGeom prst="rect">
-            <a:avLst/>
-          </a:prstGeom>
-          <a:solidFill>
-            <a:srgbClr val="167D8D"/>
-          </a:solidFill>
-          <a:ln>
-            <a:noFill/>
-          </a:ln>
-        </p:spPr>
-        <p:style>
-          <a:lnRef idx="1">
-            <a:schemeClr val="accent1"/>
-          </a:lnRef>
-          <a:fillRef idx="3">
-            <a:schemeClr val="accent1"/>
-          </a:fillRef>
-          <a:effectRef idx="2">
-            <a:schemeClr val="accent1"/>
-          </a:effectRef>
-          <a:fontRef idx="minor">
-            <a:schemeClr val="lt1"/>
-          </a:fontRef>
-        </p:style>
-        <p:txBody>
-          <a:bodyPr rtlCol="0" anchor="ctr"/>
-          <a:lstStyle/>
-          <a:p>
-            <a:pPr algn="ctr"/>
-          </a:p>
-        </p:txBody>
-      </p:sp>
+            <a:ext cx="12191695" cy="6858000"/>
+          </a:xfrm>
+          <a:prstGeom prst="rect">
+            <a:avLst/>
+          </a:prstGeom>
+        </p:spPr>
+      </p:pic>
       <p:sp>
         <p:nvSpPr>
           <p:cNvPr id="3" name="TextBox 2"/>
@@ -18713,7 +17234,7 @@
               </a:defRPr>
             </a:pPr>
             <a:r>
-              <a:t>Gruppe 4 · Aladin · Paket B · 27.10.2026 | Quellen: SBB/SKI (2026), swisstopo (2026), DuckDB Foundation (2026)</a:t>
+              <a:t>Gruppe 4 · Aladin · Paket B | Quellen: SBB/SKI (2026), swisstopo (2026), DuckDB Foundation (2026)</a:t>
             </a:r>
           </a:p>
         </p:txBody>

--- a/docs/präsentation/praesentation_gruppe4_teil1.pptx
+++ b/docs/präsentation/praesentation_gruppe4_teil1.pptx
@@ -5040,7 +5040,7 @@
               </a:defRPr>
             </a:pPr>
             <a:r>
-              <a:t>Gruppe 4: Enis, Aladin, Timon Wallroth</a:t>
+              <a:t>Gruppe 4: Enis Farizi, Aladin Kermo, Timon Wallroth</a:t>
             </a:r>
           </a:p>
         </p:txBody>

--- a/docs/präsentation/praesentation_gruppe4_teil1.pptx
+++ b/docs/präsentation/praesentation_gruppe4_teil1.pptx
@@ -5040,7 +5040,7 @@
               </a:defRPr>
             </a:pPr>
             <a:r>
-              <a:t>Gruppe 4: Enis Farizi, Aladin Kermo, Timon Wallroth</a:t>
+              <a:t>Gruppe 4: Farizi Enis, Kermo Aladin, Wallroth Timon</a:t>
             </a:r>
           </a:p>
         </p:txBody>
